--- a/docs/presentation-power-point.pptx
+++ b/docs/presentation-power-point.pptx
@@ -27,7 +27,6 @@
     <p:sldId id="272" r:id="rId24"/>
     <p:sldId id="273" r:id="rId25"/>
     <p:sldId id="274" r:id="rId26"/>
-    <p:sldId id="275" r:id="rId27"/>
   </p:sldIdLst>
   <p:sldSz cx="12192000" cy="6858000"/>
   <p:notesSz cx="6858000" cy="9144000"/>
@@ -502,7 +501,7 @@
       </p:grpSpPr>
       <p:sp>
         <p:nvSpPr>
-          <p:cNvPr id="93" name="Shape 93"/>
+          <p:cNvPr id="86" name="Shape 86"/>
           <p:cNvSpPr/>
           <p:nvPr>
             <p:ph type="sldImg"/>
@@ -523,7 +522,7 @@
       </p:sp>
       <p:sp>
         <p:nvSpPr>
-          <p:cNvPr id="94" name="Shape 94"/>
+          <p:cNvPr id="87" name="Shape 87"/>
           <p:cNvSpPr/>
           <p:nvPr>
             <p:ph type="body" sz="quarter" idx="1"/>
@@ -578,7 +577,7 @@
       </p:grpSpPr>
       <p:sp>
         <p:nvSpPr>
-          <p:cNvPr id="105" name="Shape 105"/>
+          <p:cNvPr id="98" name="Shape 98"/>
           <p:cNvSpPr/>
           <p:nvPr>
             <p:ph type="sldImg"/>
@@ -599,7 +598,7 @@
       </p:sp>
       <p:sp>
         <p:nvSpPr>
-          <p:cNvPr id="106" name="Shape 106"/>
+          <p:cNvPr id="99" name="Shape 99"/>
           <p:cNvSpPr/>
           <p:nvPr>
             <p:ph type="body" sz="quarter" idx="1"/>
@@ -654,7 +653,7 @@
       </p:grpSpPr>
       <p:sp>
         <p:nvSpPr>
-          <p:cNvPr id="134" name="Shape 134"/>
+          <p:cNvPr id="127" name="Shape 127"/>
           <p:cNvSpPr/>
           <p:nvPr>
             <p:ph type="sldImg"/>
@@ -675,7 +674,7 @@
       </p:sp>
       <p:sp>
         <p:nvSpPr>
-          <p:cNvPr id="135" name="Shape 135"/>
+          <p:cNvPr id="128" name="Shape 128"/>
           <p:cNvSpPr/>
           <p:nvPr>
             <p:ph type="body" sz="quarter" idx="1"/>
@@ -730,7 +729,7 @@
       </p:grpSpPr>
       <p:sp>
         <p:nvSpPr>
-          <p:cNvPr id="157" name="Shape 157"/>
+          <p:cNvPr id="150" name="Shape 150"/>
           <p:cNvSpPr/>
           <p:nvPr>
             <p:ph type="sldImg"/>
@@ -751,7 +750,7 @@
       </p:sp>
       <p:sp>
         <p:nvSpPr>
-          <p:cNvPr id="158" name="Shape 158"/>
+          <p:cNvPr id="151" name="Shape 151"/>
           <p:cNvSpPr/>
           <p:nvPr>
             <p:ph type="body" sz="quarter" idx="1"/>
@@ -806,7 +805,7 @@
       </p:grpSpPr>
       <p:sp>
         <p:nvSpPr>
-          <p:cNvPr id="173" name="Shape 173"/>
+          <p:cNvPr id="166" name="Shape 166"/>
           <p:cNvSpPr/>
           <p:nvPr>
             <p:ph type="sldImg"/>
@@ -827,7 +826,7 @@
       </p:sp>
       <p:sp>
         <p:nvSpPr>
-          <p:cNvPr id="174" name="Shape 174"/>
+          <p:cNvPr id="167" name="Shape 167"/>
           <p:cNvSpPr/>
           <p:nvPr>
             <p:ph type="body" sz="quarter" idx="1"/>
@@ -5915,181 +5914,7 @@
       </p:grpSpPr>
       <p:sp>
         <p:nvSpPr>
-          <p:cNvPr id="160" name="Text 1"/>
-          <p:cNvSpPr txBox="1"/>
-          <p:nvPr/>
-        </p:nvSpPr>
-        <p:spPr>
-          <a:xfrm>
-            <a:off x="658368" y="566927"/>
-            <a:ext cx="8138160" cy="530353"/>
-          </a:xfrm>
-          <a:prstGeom prst="rect">
-            <a:avLst/>
-          </a:prstGeom>
-          <a:ln w="12700">
-            <a:miter lim="400000"/>
-          </a:ln>
-          <a:extLst>
-            <a:ext uri="{C572A759-6A51-4108-AA02-DFA0A04FC94B}">
-              <ma14:wrappingTextBoxFlag xmlns:ma14="http://schemas.microsoft.com/office/mac/drawingml/2011/main" val="1"/>
-            </a:ext>
-          </a:extLst>
-        </p:spPr>
-        <p:txBody>
-          <a:bodyPr lIns="253" tIns="253" rIns="253" bIns="253" anchor="ctr">
-            <a:normAutofit fontScale="100000" lnSpcReduction="0"/>
-          </a:bodyPr>
-          <a:lstStyle>
-            <a:lvl1pPr defTabSz="859536">
-              <a:defRPr b="1" sz="2538">
-                <a:solidFill>
-                  <a:srgbClr val="212B48"/>
-                </a:solidFill>
-              </a:defRPr>
-            </a:lvl1pPr>
-          </a:lstStyle>
-          <a:p>
-            <a:pPr/>
-            <a:r>
-              <a:t>WHO-Analyse: Hypertonie-Kennzahlen im Zeitverlauf</a:t>
-            </a:r>
-          </a:p>
-        </p:txBody>
-      </p:sp>
-      <p:pic>
-        <p:nvPicPr>
-          <p:cNvPr id="161" name="who-tableau-dashboard.png" descr="who-tableau-dashboard.png"/>
-          <p:cNvPicPr>
-            <a:picLocks noChangeAspect="1"/>
-          </p:cNvPicPr>
-          <p:nvPr/>
-        </p:nvPicPr>
-        <p:blipFill>
-          <a:blip r:embed="rId2">
-            <a:extLst/>
-          </a:blip>
-          <a:srcRect l="0" t="16198" r="0" b="8969"/>
-          <a:stretch>
-            <a:fillRect/>
-          </a:stretch>
-        </p:blipFill>
-        <p:spPr>
-          <a:xfrm>
-            <a:off x="2023095" y="1684857"/>
-            <a:ext cx="8145844" cy="4546043"/>
-          </a:xfrm>
-          <a:prstGeom prst="rect">
-            <a:avLst/>
-          </a:prstGeom>
-          <a:ln w="12700">
-            <a:miter lim="400000"/>
-          </a:ln>
-        </p:spPr>
-      </p:pic>
-      <p:sp>
-        <p:nvSpPr>
-          <p:cNvPr id="162" name="Deutschland, 2000–2019 | Prävalenz, Mortalität und Geschlechterunterschiede"/>
-          <p:cNvSpPr txBox="1"/>
-          <p:nvPr/>
-        </p:nvSpPr>
-        <p:spPr>
-          <a:xfrm>
-            <a:off x="2614770" y="1335548"/>
-            <a:ext cx="9059825" cy="483555"/>
-          </a:xfrm>
-          <a:prstGeom prst="rect">
-            <a:avLst/>
-          </a:prstGeom>
-          <a:ln w="12700">
-            <a:miter lim="400000"/>
-          </a:ln>
-          <a:extLst>
-            <a:ext uri="{C572A759-6A51-4108-AA02-DFA0A04FC94B}">
-              <ma14:wrappingTextBoxFlag xmlns:ma14="http://schemas.microsoft.com/office/mac/drawingml/2011/main" val="1"/>
-            </a:ext>
-          </a:extLst>
-        </p:spPr>
-        <p:txBody>
-          <a:bodyPr lIns="45719" rIns="45719"/>
-          <a:lstStyle>
-            <a:lvl1pPr defTabSz="457200">
-              <a:defRPr b="1" sz="1400">
-                <a:solidFill>
-                  <a:srgbClr val="212B48"/>
-                </a:solidFill>
-              </a:defRPr>
-            </a:lvl1pPr>
-          </a:lstStyle>
-          <a:p>
-            <a:pPr/>
-            <a:r>
-              <a:t>Deutschland, 2000–2019 | Prävalenz, Mortalität und Geschlechterunterschiede</a:t>
-            </a:r>
-            <a:endParaRPr b="0"/>
-          </a:p>
-        </p:txBody>
-      </p:sp>
-      <p:sp>
-        <p:nvSpPr>
-          <p:cNvPr id="163" name="Foliennummer"/>
-          <p:cNvSpPr txBox="1"/>
-          <p:nvPr>
-            <p:ph type="sldNum" sz="quarter" idx="4294967295"/>
-          </p:nvPr>
-        </p:nvSpPr>
-        <p:spPr>
-          <a:xfrm>
-            <a:off x="11567159" y="6473952"/>
-            <a:ext cx="202998" cy="190551"/>
-          </a:xfrm>
-          <a:prstGeom prst="rect">
-            <a:avLst/>
-          </a:prstGeom>
-          <a:extLst>
-            <a:ext uri="{C572A759-6A51-4108-AA02-DFA0A04FC94B}">
-              <ma14:wrappingTextBoxFlag xmlns:ma14="http://schemas.microsoft.com/office/mac/drawingml/2011/main" val="1"/>
-            </a:ext>
-          </a:extLst>
-        </p:spPr>
-        <p:txBody>
-          <a:bodyPr/>
-          <a:lstStyle/>
-          <a:p>
-            <a:pPr/>
-            <a:fld id="{86CB4B4D-7CA3-9044-876B-883B54F8677D}" type="slidenum"/>
-          </a:p>
-        </p:txBody>
-      </p:sp>
-    </p:spTree>
-  </p:cSld>
-  <p:clrMapOvr>
-    <a:masterClrMapping/>
-  </p:clrMapOvr>
-  <p:transition xmlns:p14="http://schemas.microsoft.com/office/powerpoint/2010/main" spd="med" advClick="1"/>
-</p:sld>
-</file>
-
-<file path=ppt/slides/slide11.xml><?xml version="1.0" encoding="utf-8"?>
-<p:sld xmlns:a="http://schemas.openxmlformats.org/drawingml/2006/main" xmlns:r="http://schemas.openxmlformats.org/officeDocument/2006/relationships" xmlns:p="http://schemas.openxmlformats.org/presentationml/2006/main" xmlns:m="http://schemas.openxmlformats.org/officeDocument/2006/math" xmlns:a14="http://schemas.microsoft.com/office/drawing/2010/main" showMasterSp="1" showMasterPhAnim="1">
-  <p:cSld>
-    <p:spTree>
-      <p:nvGrpSpPr>
-        <p:cNvPr id="1" name=""/>
-        <p:cNvGrpSpPr/>
-        <p:nvPr/>
-      </p:nvGrpSpPr>
-      <p:grpSpPr>
-        <a:xfrm>
-          <a:off x="0" y="0"/>
-          <a:ext cx="0" cy="0"/>
-          <a:chOff x="0" y="0"/>
-          <a:chExt cx="0" cy="0"/>
-        </a:xfrm>
-      </p:grpSpPr>
-      <p:sp>
-        <p:nvSpPr>
-          <p:cNvPr id="165" name="Text 1"/>
+          <p:cNvPr id="158" name="Text 1"/>
           <p:cNvSpPr txBox="1"/>
           <p:nvPr/>
         </p:nvSpPr>
@@ -6133,7 +5958,7 @@
       </p:sp>
       <p:sp>
         <p:nvSpPr>
-          <p:cNvPr id="166" name="Shape 2"/>
+          <p:cNvPr id="159" name="Shape 2"/>
           <p:cNvSpPr/>
           <p:nvPr/>
         </p:nvSpPr>
@@ -6168,7 +5993,7 @@
       </p:sp>
       <p:sp>
         <p:nvSpPr>
-          <p:cNvPr id="167" name="Text 3"/>
+          <p:cNvPr id="160" name="Text 3"/>
           <p:cNvSpPr txBox="1"/>
           <p:nvPr/>
         </p:nvSpPr>
@@ -6212,7 +6037,7 @@
       </p:sp>
       <p:sp>
         <p:nvSpPr>
-          <p:cNvPr id="168" name="Text 4"/>
+          <p:cNvPr id="161" name="Text 4"/>
           <p:cNvSpPr txBox="1"/>
           <p:nvPr/>
         </p:nvSpPr>
@@ -6381,7 +6206,7 @@
       </p:sp>
       <p:sp>
         <p:nvSpPr>
-          <p:cNvPr id="169" name="Shape 5"/>
+          <p:cNvPr id="162" name="Shape 5"/>
           <p:cNvSpPr/>
           <p:nvPr/>
         </p:nvSpPr>
@@ -6414,7 +6239,7 @@
       </p:sp>
       <p:sp>
         <p:nvSpPr>
-          <p:cNvPr id="170" name="Text 6"/>
+          <p:cNvPr id="163" name="Text 6"/>
           <p:cNvSpPr txBox="1"/>
           <p:nvPr/>
         </p:nvSpPr>
@@ -6458,7 +6283,7 @@
       </p:sp>
       <p:sp>
         <p:nvSpPr>
-          <p:cNvPr id="171" name="Text 7"/>
+          <p:cNvPr id="164" name="Text 7"/>
           <p:cNvSpPr txBox="1"/>
           <p:nvPr/>
         </p:nvSpPr>
@@ -6682,7 +6507,7 @@
       </p:sp>
       <p:sp>
         <p:nvSpPr>
-          <p:cNvPr id="172" name="Slide Number Placeholder 0"/>
+          <p:cNvPr id="165" name="Slide Number Placeholder 0"/>
           <p:cNvSpPr txBox="1"/>
           <p:nvPr>
             <p:ph type="sldNum" sz="quarter" idx="4294967295"/>
@@ -6720,7 +6545,7 @@
 </p:sld>
 </file>
 
-<file path=ppt/slides/slide12.xml><?xml version="1.0" encoding="utf-8"?>
+<file path=ppt/slides/slide11.xml><?xml version="1.0" encoding="utf-8"?>
 <p:sld xmlns:a="http://schemas.openxmlformats.org/drawingml/2006/main" xmlns:r="http://schemas.openxmlformats.org/officeDocument/2006/relationships" xmlns:p="http://schemas.openxmlformats.org/presentationml/2006/main" xmlns:m="http://schemas.openxmlformats.org/officeDocument/2006/math" xmlns:a14="http://schemas.microsoft.com/office/drawing/2010/main" showMasterSp="1" showMasterPhAnim="1">
   <p:cSld>
     <p:spTree>
@@ -6739,7 +6564,7 @@
       </p:grpSpPr>
       <p:sp>
         <p:nvSpPr>
-          <p:cNvPr id="176" name="Rectangle 2"/>
+          <p:cNvPr id="169" name="Rectangle 2"/>
           <p:cNvSpPr/>
           <p:nvPr/>
         </p:nvSpPr>
@@ -6785,7 +6610,7 @@
       </p:sp>
       <p:sp>
         <p:nvSpPr>
-          <p:cNvPr id="177" name="Rectangle 19"/>
+          <p:cNvPr id="170" name="Rectangle 19"/>
           <p:cNvSpPr/>
           <p:nvPr/>
         </p:nvSpPr>
@@ -6831,7 +6656,7 @@
       </p:sp>
       <p:grpSp>
         <p:nvGrpSpPr>
-          <p:cNvPr id="192" name="Gruppieren"/>
+          <p:cNvPr id="185" name="Gruppieren"/>
           <p:cNvGrpSpPr/>
           <p:nvPr/>
         </p:nvGrpSpPr>
@@ -6845,7 +6670,7 @@
         </p:grpSpPr>
         <p:sp>
           <p:nvSpPr>
-            <p:cNvPr id="178" name="Oval 4"/>
+            <p:cNvPr id="171" name="Oval 4"/>
             <p:cNvSpPr/>
             <p:nvPr/>
           </p:nvSpPr>
@@ -6894,7 +6719,7 @@
         </p:sp>
         <p:sp>
           <p:nvSpPr>
-            <p:cNvPr id="179" name="Oval 5"/>
+            <p:cNvPr id="172" name="Oval 5"/>
             <p:cNvSpPr/>
             <p:nvPr/>
           </p:nvSpPr>
@@ -6943,7 +6768,7 @@
         </p:sp>
         <p:sp>
           <p:nvSpPr>
-            <p:cNvPr id="180" name="Oval 6"/>
+            <p:cNvPr id="173" name="Oval 6"/>
             <p:cNvSpPr/>
             <p:nvPr/>
           </p:nvSpPr>
@@ -6992,7 +6817,7 @@
         </p:sp>
         <p:sp>
           <p:nvSpPr>
-            <p:cNvPr id="181" name="Oval 7"/>
+            <p:cNvPr id="174" name="Oval 7"/>
             <p:cNvSpPr/>
             <p:nvPr/>
           </p:nvSpPr>
@@ -7041,7 +6866,7 @@
         </p:sp>
         <p:sp>
           <p:nvSpPr>
-            <p:cNvPr id="182" name="Oval 8"/>
+            <p:cNvPr id="175" name="Oval 8"/>
             <p:cNvSpPr/>
             <p:nvPr/>
           </p:nvSpPr>
@@ -7090,7 +6915,7 @@
         </p:sp>
         <p:sp>
           <p:nvSpPr>
-            <p:cNvPr id="183" name="Oval 9"/>
+            <p:cNvPr id="176" name="Oval 9"/>
             <p:cNvSpPr/>
             <p:nvPr/>
           </p:nvSpPr>
@@ -7139,7 +6964,7 @@
         </p:sp>
         <p:sp>
           <p:nvSpPr>
-            <p:cNvPr id="184" name="Oval 10"/>
+            <p:cNvPr id="177" name="Oval 10"/>
             <p:cNvSpPr/>
             <p:nvPr/>
           </p:nvSpPr>
@@ -7188,7 +7013,7 @@
         </p:sp>
         <p:sp>
           <p:nvSpPr>
-            <p:cNvPr id="185" name="Rectangle 11"/>
+            <p:cNvPr id="178" name="Rectangle 11"/>
             <p:cNvSpPr/>
             <p:nvPr/>
           </p:nvSpPr>
@@ -7237,7 +7062,7 @@
         </p:sp>
         <p:sp>
           <p:nvSpPr>
-            <p:cNvPr id="186" name="Rectangle 12"/>
+            <p:cNvPr id="179" name="Rectangle 12"/>
             <p:cNvSpPr/>
             <p:nvPr/>
           </p:nvSpPr>
@@ -7286,7 +7111,7 @@
         </p:sp>
         <p:sp>
           <p:nvSpPr>
-            <p:cNvPr id="187" name="Rectangle 13"/>
+            <p:cNvPr id="180" name="Rectangle 13"/>
             <p:cNvSpPr/>
             <p:nvPr/>
           </p:nvSpPr>
@@ -7335,7 +7160,7 @@
         </p:sp>
         <p:sp>
           <p:nvSpPr>
-            <p:cNvPr id="188" name="Rectangle 14"/>
+            <p:cNvPr id="181" name="Rectangle 14"/>
             <p:cNvSpPr/>
             <p:nvPr/>
           </p:nvSpPr>
@@ -7384,7 +7209,7 @@
         </p:sp>
         <p:sp>
           <p:nvSpPr>
-            <p:cNvPr id="189" name="Rectangle 15"/>
+            <p:cNvPr id="182" name="Rectangle 15"/>
             <p:cNvSpPr/>
             <p:nvPr/>
           </p:nvSpPr>
@@ -7433,7 +7258,7 @@
         </p:sp>
         <p:sp>
           <p:nvSpPr>
-            <p:cNvPr id="190" name="Rectangle 16"/>
+            <p:cNvPr id="183" name="Rectangle 16"/>
             <p:cNvSpPr/>
             <p:nvPr/>
           </p:nvSpPr>
@@ -7482,7 +7307,7 @@
         </p:sp>
         <p:sp>
           <p:nvSpPr>
-            <p:cNvPr id="191" name="Rectangle 15"/>
+            <p:cNvPr id="184" name="Rectangle 15"/>
             <p:cNvSpPr/>
             <p:nvPr/>
           </p:nvSpPr>
@@ -7532,7 +7357,7 @@
       </p:grpSp>
       <p:sp>
         <p:nvSpPr>
-          <p:cNvPr id="193" name="Text 5"/>
+          <p:cNvPr id="186" name="Text 5"/>
           <p:cNvSpPr txBox="1"/>
           <p:nvPr/>
         </p:nvSpPr>
@@ -7586,7 +7411,7 @@
       </p:sp>
       <p:sp>
         <p:nvSpPr>
-          <p:cNvPr id="194" name="Text 6"/>
+          <p:cNvPr id="187" name="Text 6"/>
           <p:cNvSpPr txBox="1"/>
           <p:nvPr/>
         </p:nvSpPr>
@@ -7630,7 +7455,7 @@
       </p:sp>
       <p:sp>
         <p:nvSpPr>
-          <p:cNvPr id="195" name="Text 8"/>
+          <p:cNvPr id="188" name="Text 8"/>
           <p:cNvSpPr txBox="1"/>
           <p:nvPr/>
         </p:nvSpPr>
@@ -7681,7 +7506,7 @@
 </p:sld>
 </file>
 
-<file path=ppt/slides/slide13.xml><?xml version="1.0" encoding="utf-8"?>
+<file path=ppt/slides/slide12.xml><?xml version="1.0" encoding="utf-8"?>
 <p:sld xmlns:a="http://schemas.openxmlformats.org/drawingml/2006/main" xmlns:r="http://schemas.openxmlformats.org/officeDocument/2006/relationships" xmlns:p="http://schemas.openxmlformats.org/presentationml/2006/main" xmlns:m="http://schemas.openxmlformats.org/officeDocument/2006/math" xmlns:a14="http://schemas.microsoft.com/office/drawing/2010/main" showMasterSp="1" showMasterPhAnim="1">
   <p:cSld>
     <p:spTree>
@@ -7700,7 +7525,7 @@
       </p:grpSpPr>
       <p:sp>
         <p:nvSpPr>
-          <p:cNvPr id="197" name="Text 1"/>
+          <p:cNvPr id="190" name="Text 1"/>
           <p:cNvSpPr txBox="1"/>
           <p:nvPr/>
         </p:nvSpPr>
@@ -7744,7 +7569,7 @@
       </p:sp>
       <p:sp>
         <p:nvSpPr>
-          <p:cNvPr id="198" name="Datenquelle: National Health and Nutrition Examination Survey…"/>
+          <p:cNvPr id="191" name="Datenquelle: National Health and Nutrition Examination Survey…"/>
           <p:cNvSpPr txBox="1"/>
           <p:nvPr/>
         </p:nvSpPr>
@@ -8062,7 +7887,7 @@
       </p:sp>
       <p:sp>
         <p:nvSpPr>
-          <p:cNvPr id="199" name="Foliennummer"/>
+          <p:cNvPr id="192" name="Foliennummer"/>
           <p:cNvSpPr txBox="1"/>
           <p:nvPr>
             <p:ph type="sldNum" sz="quarter" idx="4294967295"/>
@@ -8100,7 +7925,7 @@
 </p:sld>
 </file>
 
-<file path=ppt/slides/slide14.xml><?xml version="1.0" encoding="utf-8"?>
+<file path=ppt/slides/slide13.xml><?xml version="1.0" encoding="utf-8"?>
 <p:sld xmlns:a="http://schemas.openxmlformats.org/drawingml/2006/main" xmlns:r="http://schemas.openxmlformats.org/officeDocument/2006/relationships" xmlns:p="http://schemas.openxmlformats.org/presentationml/2006/main" xmlns:m="http://schemas.openxmlformats.org/officeDocument/2006/math" xmlns:a14="http://schemas.microsoft.com/office/drawing/2010/main" showMasterSp="1" showMasterPhAnim="1">
   <p:cSld>
     <p:spTree>
@@ -8119,7 +7944,7 @@
       </p:grpSpPr>
       <p:sp>
         <p:nvSpPr>
-          <p:cNvPr id="201" name="Text 1"/>
+          <p:cNvPr id="194" name="Text 1"/>
           <p:cNvSpPr txBox="1"/>
           <p:nvPr/>
         </p:nvSpPr>
@@ -8163,7 +7988,7 @@
       </p:sp>
       <p:sp>
         <p:nvSpPr>
-          <p:cNvPr id="202" name="Shape 12"/>
+          <p:cNvPr id="195" name="Shape 12"/>
           <p:cNvSpPr/>
           <p:nvPr/>
         </p:nvSpPr>
@@ -8198,7 +8023,7 @@
       </p:sp>
       <p:sp>
         <p:nvSpPr>
-          <p:cNvPr id="203" name="Text 13"/>
+          <p:cNvPr id="196" name="Text 13"/>
           <p:cNvSpPr txBox="1"/>
           <p:nvPr/>
         </p:nvSpPr>
@@ -8242,7 +8067,7 @@
       </p:sp>
       <p:sp>
         <p:nvSpPr>
-          <p:cNvPr id="204" name="Text 14"/>
+          <p:cNvPr id="197" name="Text 14"/>
           <p:cNvSpPr txBox="1"/>
           <p:nvPr/>
         </p:nvSpPr>
@@ -8314,7 +8139,7 @@
       </p:sp>
       <p:sp>
         <p:nvSpPr>
-          <p:cNvPr id="205" name="Shape 12"/>
+          <p:cNvPr id="198" name="Shape 12"/>
           <p:cNvSpPr/>
           <p:nvPr/>
         </p:nvSpPr>
@@ -8349,7 +8174,7 @@
       </p:sp>
       <p:sp>
         <p:nvSpPr>
-          <p:cNvPr id="206" name="Text 13"/>
+          <p:cNvPr id="199" name="Text 13"/>
           <p:cNvSpPr txBox="1"/>
           <p:nvPr/>
         </p:nvSpPr>
@@ -8393,7 +8218,7 @@
       </p:sp>
       <p:sp>
         <p:nvSpPr>
-          <p:cNvPr id="207" name="Text 14"/>
+          <p:cNvPr id="200" name="Text 14"/>
           <p:cNvSpPr txBox="1"/>
           <p:nvPr/>
         </p:nvSpPr>
@@ -8445,6 +8270,303 @@
             </a:pPr>
             <a:r>
               <a:t>NHANES verbindet Befragung, Untersuchung und Messwerte auf Personenebene</a:t>
+            </a:r>
+          </a:p>
+        </p:txBody>
+      </p:sp>
+      <p:sp>
+        <p:nvSpPr>
+          <p:cNvPr id="201" name="Foliennummer"/>
+          <p:cNvSpPr txBox="1"/>
+          <p:nvPr>
+            <p:ph type="sldNum" sz="quarter" idx="4294967295"/>
+          </p:nvPr>
+        </p:nvSpPr>
+        <p:spPr>
+          <a:xfrm>
+            <a:off x="11567159" y="6473952"/>
+            <a:ext cx="202998" cy="190551"/>
+          </a:xfrm>
+          <a:prstGeom prst="rect">
+            <a:avLst/>
+          </a:prstGeom>
+          <a:extLst>
+            <a:ext uri="{C572A759-6A51-4108-AA02-DFA0A04FC94B}">
+              <ma14:wrappingTextBoxFlag xmlns:ma14="http://schemas.microsoft.com/office/mac/drawingml/2011/main" val="1"/>
+            </a:ext>
+          </a:extLst>
+        </p:spPr>
+        <p:txBody>
+          <a:bodyPr/>
+          <a:lstStyle/>
+          <a:p>
+            <a:pPr/>
+            <a:fld id="{86CB4B4D-7CA3-9044-876B-883B54F8677D}" type="slidenum"/>
+          </a:p>
+        </p:txBody>
+      </p:sp>
+    </p:spTree>
+  </p:cSld>
+  <p:clrMapOvr>
+    <a:masterClrMapping/>
+  </p:clrMapOvr>
+  <p:transition xmlns:p14="http://schemas.microsoft.com/office/powerpoint/2010/main" spd="med" advClick="1"/>
+</p:sld>
+</file>
+
+<file path=ppt/slides/slide14.xml><?xml version="1.0" encoding="utf-8"?>
+<p:sld xmlns:a="http://schemas.openxmlformats.org/drawingml/2006/main" xmlns:r="http://schemas.openxmlformats.org/officeDocument/2006/relationships" xmlns:p="http://schemas.openxmlformats.org/presentationml/2006/main" xmlns:m="http://schemas.openxmlformats.org/officeDocument/2006/math" xmlns:a14="http://schemas.microsoft.com/office/drawing/2010/main" showMasterSp="1" showMasterPhAnim="1">
+  <p:cSld>
+    <p:spTree>
+      <p:nvGrpSpPr>
+        <p:cNvPr id="1" name=""/>
+        <p:cNvGrpSpPr/>
+        <p:nvPr/>
+      </p:nvGrpSpPr>
+      <p:grpSpPr>
+        <a:xfrm>
+          <a:off x="0" y="0"/>
+          <a:ext cx="0" cy="0"/>
+          <a:chOff x="0" y="0"/>
+          <a:chExt cx="0" cy="0"/>
+        </a:xfrm>
+      </p:grpSpPr>
+      <p:sp>
+        <p:nvSpPr>
+          <p:cNvPr id="203" name="Text 1"/>
+          <p:cNvSpPr txBox="1"/>
+          <p:nvPr/>
+        </p:nvSpPr>
+        <p:spPr>
+          <a:xfrm>
+            <a:off x="658368" y="583665"/>
+            <a:ext cx="8138160" cy="530353"/>
+          </a:xfrm>
+          <a:prstGeom prst="rect">
+            <a:avLst/>
+          </a:prstGeom>
+          <a:ln w="12700">
+            <a:miter lim="400000"/>
+          </a:ln>
+          <a:extLst>
+            <a:ext uri="{C572A759-6A51-4108-AA02-DFA0A04FC94B}">
+              <ma14:wrappingTextBoxFlag xmlns:ma14="http://schemas.microsoft.com/office/mac/drawingml/2011/main" val="1"/>
+            </a:ext>
+          </a:extLst>
+        </p:spPr>
+        <p:txBody>
+          <a:bodyPr lIns="253" tIns="253" rIns="253" bIns="253" anchor="ctr">
+            <a:normAutofit fontScale="100000" lnSpcReduction="0"/>
+          </a:bodyPr>
+          <a:lstStyle>
+            <a:lvl1pPr>
+              <a:defRPr b="1" sz="2700">
+                <a:solidFill>
+                  <a:srgbClr val="212B48"/>
+                </a:solidFill>
+              </a:defRPr>
+            </a:lvl1pPr>
+          </a:lstStyle>
+          <a:p>
+            <a:pPr/>
+            <a:r>
+              <a:t>Forschungsfragen - NHANES-Daten</a:t>
+            </a:r>
+          </a:p>
+        </p:txBody>
+      </p:sp>
+      <p:sp>
+        <p:nvSpPr>
+          <p:cNvPr id="204" name="Shape 12"/>
+          <p:cNvSpPr/>
+          <p:nvPr/>
+        </p:nvSpPr>
+        <p:spPr>
+          <a:xfrm>
+            <a:off x="6777554" y="2522393"/>
+            <a:ext cx="3534163" cy="1813214"/>
+          </a:xfrm>
+          <a:prstGeom prst="roundRect">
+            <a:avLst>
+              <a:gd name="adj" fmla="val 3025"/>
+            </a:avLst>
+          </a:prstGeom>
+          <a:solidFill>
+            <a:srgbClr val="DFF3FA"/>
+          </a:solidFill>
+          <a:ln w="12700">
+            <a:solidFill>
+              <a:srgbClr val="DFF3FA">
+                <a:alpha val="0"/>
+              </a:srgbClr>
+            </a:solidFill>
+          </a:ln>
+        </p:spPr>
+        <p:txBody>
+          <a:bodyPr lIns="45719" rIns="45719"/>
+          <a:lstStyle/>
+          <a:p>
+            <a:pPr/>
+          </a:p>
+        </p:txBody>
+      </p:sp>
+      <p:sp>
+        <p:nvSpPr>
+          <p:cNvPr id="205" name="Shape 12"/>
+          <p:cNvSpPr/>
+          <p:nvPr/>
+        </p:nvSpPr>
+        <p:spPr>
+          <a:xfrm>
+            <a:off x="1776112" y="2522393"/>
+            <a:ext cx="3534163" cy="1813214"/>
+          </a:xfrm>
+          <a:prstGeom prst="roundRect">
+            <a:avLst>
+              <a:gd name="adj" fmla="val 3025"/>
+            </a:avLst>
+          </a:prstGeom>
+          <a:solidFill>
+            <a:srgbClr val="E3F2F9"/>
+          </a:solidFill>
+          <a:ln w="12700">
+            <a:solidFill>
+              <a:srgbClr val="DFF3FA">
+                <a:alpha val="0"/>
+              </a:srgbClr>
+            </a:solidFill>
+          </a:ln>
+        </p:spPr>
+        <p:txBody>
+          <a:bodyPr lIns="45719" rIns="45719"/>
+          <a:lstStyle/>
+          <a:p>
+            <a:pPr/>
+          </a:p>
+        </p:txBody>
+      </p:sp>
+      <p:sp>
+        <p:nvSpPr>
+          <p:cNvPr id="206" name="1. Vorhersage…"/>
+          <p:cNvSpPr txBox="1"/>
+          <p:nvPr/>
+        </p:nvSpPr>
+        <p:spPr>
+          <a:xfrm>
+            <a:off x="1827496" y="2685036"/>
+            <a:ext cx="3307293" cy="1749247"/>
+          </a:xfrm>
+          <a:prstGeom prst="rect">
+            <a:avLst/>
+          </a:prstGeom>
+          <a:ln w="12700">
+            <a:miter lim="400000"/>
+          </a:ln>
+          <a:extLst>
+            <a:ext uri="{C572A759-6A51-4108-AA02-DFA0A04FC94B}">
+              <ma14:wrappingTextBoxFlag xmlns:ma14="http://schemas.microsoft.com/office/mac/drawingml/2011/main" val="1"/>
+            </a:ext>
+          </a:extLst>
+        </p:spPr>
+        <p:txBody>
+          <a:bodyPr lIns="45719" rIns="45719">
+            <a:spAutoFit/>
+          </a:bodyPr>
+          <a:lstStyle/>
+          <a:p>
+            <a:pPr lvl="1" indent="228600">
+              <a:defRPr b="1" sz="1700">
+                <a:solidFill>
+                  <a:srgbClr val="212B48"/>
+                </a:solidFill>
+              </a:defRPr>
+            </a:pPr>
+            <a:r>
+              <a:t>1. Vorhersage</a:t>
+            </a:r>
+          </a:p>
+          <a:p>
+            <a:pPr>
+              <a:defRPr b="1" sz="1600">
+                <a:solidFill>
+                  <a:srgbClr val="212B48"/>
+                </a:solidFill>
+              </a:defRPr>
+            </a:pPr>
+          </a:p>
+          <a:p>
+            <a:pPr lvl="1" indent="228600">
+              <a:defRPr sz="1600">
+                <a:solidFill>
+                  <a:srgbClr val="212B48"/>
+                </a:solidFill>
+              </a:defRPr>
+            </a:pPr>
+            <a:r>
+              <a:t>Kann ein Machine-Learning-Modell auf Basis individueller NHANES-Daten vorhersagen, ob eine Person Hypertonie hat?</a:t>
+            </a:r>
+          </a:p>
+        </p:txBody>
+      </p:sp>
+      <p:sp>
+        <p:nvSpPr>
+          <p:cNvPr id="207" name="2. Risikofaktoren…"/>
+          <p:cNvSpPr txBox="1"/>
+          <p:nvPr/>
+        </p:nvSpPr>
+        <p:spPr>
+          <a:xfrm>
+            <a:off x="6796604" y="2685036"/>
+            <a:ext cx="3355883" cy="1279552"/>
+          </a:xfrm>
+          <a:prstGeom prst="rect">
+            <a:avLst/>
+          </a:prstGeom>
+          <a:ln w="12700">
+            <a:miter lim="400000"/>
+          </a:ln>
+          <a:extLst>
+            <a:ext uri="{C572A759-6A51-4108-AA02-DFA0A04FC94B}">
+              <ma14:wrappingTextBoxFlag xmlns:ma14="http://schemas.microsoft.com/office/mac/drawingml/2011/main" val="1"/>
+            </a:ext>
+          </a:extLst>
+        </p:spPr>
+        <p:txBody>
+          <a:bodyPr lIns="45719" rIns="45719">
+            <a:spAutoFit/>
+          </a:bodyPr>
+          <a:lstStyle/>
+          <a:p>
+            <a:pPr lvl="1" indent="228600">
+              <a:defRPr b="1" sz="1700">
+                <a:solidFill>
+                  <a:srgbClr val="212B48"/>
+                </a:solidFill>
+              </a:defRPr>
+            </a:pPr>
+            <a:r>
+              <a:t>2. Risikofaktoren</a:t>
+            </a:r>
+          </a:p>
+          <a:p>
+            <a:pPr>
+              <a:defRPr b="1" sz="1600">
+                <a:solidFill>
+                  <a:srgbClr val="212B48"/>
+                </a:solidFill>
+              </a:defRPr>
+            </a:pPr>
+          </a:p>
+          <a:p>
+            <a:pPr lvl="1" indent="228600">
+              <a:defRPr sz="1600">
+                <a:solidFill>
+                  <a:srgbClr val="212B48"/>
+                </a:solidFill>
+              </a:defRPr>
+            </a:pPr>
+            <a:r>
+              <a:t>Welche Merkmale tragen im Modell am stärksten zur Hypertonie-Vorhersage bei?</a:t>
             </a:r>
           </a:p>
         </p:txBody>
@@ -8514,303 +8636,6 @@
         </p:nvSpPr>
         <p:spPr>
           <a:xfrm>
-            <a:off x="658368" y="583665"/>
-            <a:ext cx="8138160" cy="530353"/>
-          </a:xfrm>
-          <a:prstGeom prst="rect">
-            <a:avLst/>
-          </a:prstGeom>
-          <a:ln w="12700">
-            <a:miter lim="400000"/>
-          </a:ln>
-          <a:extLst>
-            <a:ext uri="{C572A759-6A51-4108-AA02-DFA0A04FC94B}">
-              <ma14:wrappingTextBoxFlag xmlns:ma14="http://schemas.microsoft.com/office/mac/drawingml/2011/main" val="1"/>
-            </a:ext>
-          </a:extLst>
-        </p:spPr>
-        <p:txBody>
-          <a:bodyPr lIns="253" tIns="253" rIns="253" bIns="253" anchor="ctr">
-            <a:normAutofit fontScale="100000" lnSpcReduction="0"/>
-          </a:bodyPr>
-          <a:lstStyle>
-            <a:lvl1pPr>
-              <a:defRPr b="1" sz="2700">
-                <a:solidFill>
-                  <a:srgbClr val="212B48"/>
-                </a:solidFill>
-              </a:defRPr>
-            </a:lvl1pPr>
-          </a:lstStyle>
-          <a:p>
-            <a:pPr/>
-            <a:r>
-              <a:t>Forschungsfragen - NHANES-Daten</a:t>
-            </a:r>
-          </a:p>
-        </p:txBody>
-      </p:sp>
-      <p:sp>
-        <p:nvSpPr>
-          <p:cNvPr id="211" name="Shape 12"/>
-          <p:cNvSpPr/>
-          <p:nvPr/>
-        </p:nvSpPr>
-        <p:spPr>
-          <a:xfrm>
-            <a:off x="6777554" y="2522393"/>
-            <a:ext cx="3534163" cy="1813214"/>
-          </a:xfrm>
-          <a:prstGeom prst="roundRect">
-            <a:avLst>
-              <a:gd name="adj" fmla="val 3025"/>
-            </a:avLst>
-          </a:prstGeom>
-          <a:solidFill>
-            <a:srgbClr val="DFF3FA"/>
-          </a:solidFill>
-          <a:ln w="12700">
-            <a:solidFill>
-              <a:srgbClr val="DFF3FA">
-                <a:alpha val="0"/>
-              </a:srgbClr>
-            </a:solidFill>
-          </a:ln>
-        </p:spPr>
-        <p:txBody>
-          <a:bodyPr lIns="45719" rIns="45719"/>
-          <a:lstStyle/>
-          <a:p>
-            <a:pPr/>
-          </a:p>
-        </p:txBody>
-      </p:sp>
-      <p:sp>
-        <p:nvSpPr>
-          <p:cNvPr id="212" name="Shape 12"/>
-          <p:cNvSpPr/>
-          <p:nvPr/>
-        </p:nvSpPr>
-        <p:spPr>
-          <a:xfrm>
-            <a:off x="1776112" y="2522393"/>
-            <a:ext cx="3534163" cy="1813214"/>
-          </a:xfrm>
-          <a:prstGeom prst="roundRect">
-            <a:avLst>
-              <a:gd name="adj" fmla="val 3025"/>
-            </a:avLst>
-          </a:prstGeom>
-          <a:solidFill>
-            <a:srgbClr val="E3F2F9"/>
-          </a:solidFill>
-          <a:ln w="12700">
-            <a:solidFill>
-              <a:srgbClr val="DFF3FA">
-                <a:alpha val="0"/>
-              </a:srgbClr>
-            </a:solidFill>
-          </a:ln>
-        </p:spPr>
-        <p:txBody>
-          <a:bodyPr lIns="45719" rIns="45719"/>
-          <a:lstStyle/>
-          <a:p>
-            <a:pPr/>
-          </a:p>
-        </p:txBody>
-      </p:sp>
-      <p:sp>
-        <p:nvSpPr>
-          <p:cNvPr id="213" name="1. Vorhersage…"/>
-          <p:cNvSpPr txBox="1"/>
-          <p:nvPr/>
-        </p:nvSpPr>
-        <p:spPr>
-          <a:xfrm>
-            <a:off x="1827496" y="2685036"/>
-            <a:ext cx="3307293" cy="1749247"/>
-          </a:xfrm>
-          <a:prstGeom prst="rect">
-            <a:avLst/>
-          </a:prstGeom>
-          <a:ln w="12700">
-            <a:miter lim="400000"/>
-          </a:ln>
-          <a:extLst>
-            <a:ext uri="{C572A759-6A51-4108-AA02-DFA0A04FC94B}">
-              <ma14:wrappingTextBoxFlag xmlns:ma14="http://schemas.microsoft.com/office/mac/drawingml/2011/main" val="1"/>
-            </a:ext>
-          </a:extLst>
-        </p:spPr>
-        <p:txBody>
-          <a:bodyPr lIns="45719" rIns="45719">
-            <a:spAutoFit/>
-          </a:bodyPr>
-          <a:lstStyle/>
-          <a:p>
-            <a:pPr lvl="1" indent="228600">
-              <a:defRPr b="1" sz="1700">
-                <a:solidFill>
-                  <a:srgbClr val="212B48"/>
-                </a:solidFill>
-              </a:defRPr>
-            </a:pPr>
-            <a:r>
-              <a:t>1. Vorhersage</a:t>
-            </a:r>
-          </a:p>
-          <a:p>
-            <a:pPr>
-              <a:defRPr b="1" sz="1600">
-                <a:solidFill>
-                  <a:srgbClr val="212B48"/>
-                </a:solidFill>
-              </a:defRPr>
-            </a:pPr>
-          </a:p>
-          <a:p>
-            <a:pPr lvl="1" indent="228600">
-              <a:defRPr sz="1600">
-                <a:solidFill>
-                  <a:srgbClr val="212B48"/>
-                </a:solidFill>
-              </a:defRPr>
-            </a:pPr>
-            <a:r>
-              <a:t>Kann ein Machine-Learning-Modell auf Basis individueller NHANES-Daten vorhersagen, ob eine Person Hypertonie hat?</a:t>
-            </a:r>
-          </a:p>
-        </p:txBody>
-      </p:sp>
-      <p:sp>
-        <p:nvSpPr>
-          <p:cNvPr id="214" name="2. Risikofaktoren…"/>
-          <p:cNvSpPr txBox="1"/>
-          <p:nvPr/>
-        </p:nvSpPr>
-        <p:spPr>
-          <a:xfrm>
-            <a:off x="6796604" y="2685036"/>
-            <a:ext cx="3355883" cy="1279552"/>
-          </a:xfrm>
-          <a:prstGeom prst="rect">
-            <a:avLst/>
-          </a:prstGeom>
-          <a:ln w="12700">
-            <a:miter lim="400000"/>
-          </a:ln>
-          <a:extLst>
-            <a:ext uri="{C572A759-6A51-4108-AA02-DFA0A04FC94B}">
-              <ma14:wrappingTextBoxFlag xmlns:ma14="http://schemas.microsoft.com/office/mac/drawingml/2011/main" val="1"/>
-            </a:ext>
-          </a:extLst>
-        </p:spPr>
-        <p:txBody>
-          <a:bodyPr lIns="45719" rIns="45719">
-            <a:spAutoFit/>
-          </a:bodyPr>
-          <a:lstStyle/>
-          <a:p>
-            <a:pPr lvl="1" indent="228600">
-              <a:defRPr b="1" sz="1700">
-                <a:solidFill>
-                  <a:srgbClr val="212B48"/>
-                </a:solidFill>
-              </a:defRPr>
-            </a:pPr>
-            <a:r>
-              <a:t>2. Risikofaktoren</a:t>
-            </a:r>
-          </a:p>
-          <a:p>
-            <a:pPr>
-              <a:defRPr b="1" sz="1600">
-                <a:solidFill>
-                  <a:srgbClr val="212B48"/>
-                </a:solidFill>
-              </a:defRPr>
-            </a:pPr>
-          </a:p>
-          <a:p>
-            <a:pPr lvl="1" indent="228600">
-              <a:defRPr sz="1600">
-                <a:solidFill>
-                  <a:srgbClr val="212B48"/>
-                </a:solidFill>
-              </a:defRPr>
-            </a:pPr>
-            <a:r>
-              <a:t>Welche Merkmale tragen im Modell am stärksten zur Hypertonie-Vorhersage bei?</a:t>
-            </a:r>
-          </a:p>
-        </p:txBody>
-      </p:sp>
-      <p:sp>
-        <p:nvSpPr>
-          <p:cNvPr id="215" name="Foliennummer"/>
-          <p:cNvSpPr txBox="1"/>
-          <p:nvPr>
-            <p:ph type="sldNum" sz="quarter" idx="4294967295"/>
-          </p:nvPr>
-        </p:nvSpPr>
-        <p:spPr>
-          <a:xfrm>
-            <a:off x="11567159" y="6473952"/>
-            <a:ext cx="202998" cy="190551"/>
-          </a:xfrm>
-          <a:prstGeom prst="rect">
-            <a:avLst/>
-          </a:prstGeom>
-          <a:extLst>
-            <a:ext uri="{C572A759-6A51-4108-AA02-DFA0A04FC94B}">
-              <ma14:wrappingTextBoxFlag xmlns:ma14="http://schemas.microsoft.com/office/mac/drawingml/2011/main" val="1"/>
-            </a:ext>
-          </a:extLst>
-        </p:spPr>
-        <p:txBody>
-          <a:bodyPr/>
-          <a:lstStyle/>
-          <a:p>
-            <a:pPr/>
-            <a:fld id="{86CB4B4D-7CA3-9044-876B-883B54F8677D}" type="slidenum"/>
-          </a:p>
-        </p:txBody>
-      </p:sp>
-    </p:spTree>
-  </p:cSld>
-  <p:clrMapOvr>
-    <a:masterClrMapping/>
-  </p:clrMapOvr>
-  <p:transition xmlns:p14="http://schemas.microsoft.com/office/powerpoint/2010/main" spd="med" advClick="1"/>
-</p:sld>
-</file>
-
-<file path=ppt/slides/slide16.xml><?xml version="1.0" encoding="utf-8"?>
-<p:sld xmlns:a="http://schemas.openxmlformats.org/drawingml/2006/main" xmlns:r="http://schemas.openxmlformats.org/officeDocument/2006/relationships" xmlns:p="http://schemas.openxmlformats.org/presentationml/2006/main" xmlns:m="http://schemas.openxmlformats.org/officeDocument/2006/math" xmlns:a14="http://schemas.microsoft.com/office/drawing/2010/main" showMasterSp="1" showMasterPhAnim="1">
-  <p:cSld>
-    <p:spTree>
-      <p:nvGrpSpPr>
-        <p:cNvPr id="1" name=""/>
-        <p:cNvGrpSpPr/>
-        <p:nvPr/>
-      </p:nvGrpSpPr>
-      <p:grpSpPr>
-        <a:xfrm>
-          <a:off x="0" y="0"/>
-          <a:ext cx="0" cy="0"/>
-          <a:chOff x="0" y="0"/>
-          <a:chExt cx="0" cy="0"/>
-        </a:xfrm>
-      </p:grpSpPr>
-      <p:sp>
-        <p:nvSpPr>
-          <p:cNvPr id="217" name="Text 1"/>
-          <p:cNvSpPr txBox="1"/>
-          <p:nvPr/>
-        </p:nvSpPr>
-        <p:spPr>
-          <a:xfrm>
             <a:off x="658368" y="566927"/>
             <a:ext cx="8138160" cy="530353"/>
           </a:xfrm>
@@ -8849,7 +8674,7 @@
       </p:sp>
       <p:sp>
         <p:nvSpPr>
-          <p:cNvPr id="218" name="Shape 1"/>
+          <p:cNvPr id="211" name="Shape 1"/>
           <p:cNvSpPr/>
           <p:nvPr/>
         </p:nvSpPr>
@@ -8891,7 +8716,7 @@
       </p:sp>
       <p:sp>
         <p:nvSpPr>
-          <p:cNvPr id="219" name="Text 2"/>
+          <p:cNvPr id="212" name="Text 2"/>
           <p:cNvSpPr txBox="1"/>
           <p:nvPr/>
         </p:nvSpPr>
@@ -8937,7 +8762,7 @@
       </p:sp>
       <p:sp>
         <p:nvSpPr>
-          <p:cNvPr id="220" name="Text 3"/>
+          <p:cNvPr id="213" name="Text 3"/>
           <p:cNvSpPr txBox="1"/>
           <p:nvPr/>
         </p:nvSpPr>
@@ -8983,7 +8808,7 @@
       </p:sp>
       <p:sp>
         <p:nvSpPr>
-          <p:cNvPr id="221" name="Text 4"/>
+          <p:cNvPr id="214" name="Text 4"/>
           <p:cNvSpPr txBox="1"/>
           <p:nvPr/>
         </p:nvSpPr>
@@ -9029,7 +8854,7 @@
       </p:sp>
       <p:sp>
         <p:nvSpPr>
-          <p:cNvPr id="222" name="Shape 5"/>
+          <p:cNvPr id="215" name="Shape 5"/>
           <p:cNvSpPr/>
           <p:nvPr/>
         </p:nvSpPr>
@@ -9071,7 +8896,7 @@
       </p:sp>
       <p:sp>
         <p:nvSpPr>
-          <p:cNvPr id="223" name="Text 6"/>
+          <p:cNvPr id="216" name="Text 6"/>
           <p:cNvSpPr txBox="1"/>
           <p:nvPr/>
         </p:nvSpPr>
@@ -9117,7 +8942,7 @@
       </p:sp>
       <p:sp>
         <p:nvSpPr>
-          <p:cNvPr id="224" name="Text 7"/>
+          <p:cNvPr id="217" name="Text 7"/>
           <p:cNvSpPr txBox="1"/>
           <p:nvPr/>
         </p:nvSpPr>
@@ -9163,7 +8988,7 @@
       </p:sp>
       <p:sp>
         <p:nvSpPr>
-          <p:cNvPr id="225" name="Text 8"/>
+          <p:cNvPr id="218" name="Text 8"/>
           <p:cNvSpPr txBox="1"/>
           <p:nvPr/>
         </p:nvSpPr>
@@ -9209,7 +9034,7 @@
       </p:sp>
       <p:sp>
         <p:nvSpPr>
-          <p:cNvPr id="226" name="Shape 9"/>
+          <p:cNvPr id="219" name="Shape 9"/>
           <p:cNvSpPr/>
           <p:nvPr/>
         </p:nvSpPr>
@@ -9251,7 +9076,7 @@
       </p:sp>
       <p:sp>
         <p:nvSpPr>
-          <p:cNvPr id="227" name="Text 10"/>
+          <p:cNvPr id="220" name="Text 10"/>
           <p:cNvSpPr txBox="1"/>
           <p:nvPr/>
         </p:nvSpPr>
@@ -9297,7 +9122,7 @@
       </p:sp>
       <p:sp>
         <p:nvSpPr>
-          <p:cNvPr id="228" name="Text 11"/>
+          <p:cNvPr id="221" name="Text 11"/>
           <p:cNvSpPr txBox="1"/>
           <p:nvPr/>
         </p:nvSpPr>
@@ -9343,7 +9168,7 @@
       </p:sp>
       <p:sp>
         <p:nvSpPr>
-          <p:cNvPr id="229" name="Text 12"/>
+          <p:cNvPr id="222" name="Text 12"/>
           <p:cNvSpPr txBox="1"/>
           <p:nvPr/>
         </p:nvSpPr>
@@ -9389,7 +9214,7 @@
       </p:sp>
       <p:sp>
         <p:nvSpPr>
-          <p:cNvPr id="230" name="Shape 13"/>
+          <p:cNvPr id="223" name="Shape 13"/>
           <p:cNvSpPr/>
           <p:nvPr/>
         </p:nvSpPr>
@@ -9431,7 +9256,7 @@
       </p:sp>
       <p:sp>
         <p:nvSpPr>
-          <p:cNvPr id="231" name="Text 14"/>
+          <p:cNvPr id="224" name="Text 14"/>
           <p:cNvSpPr txBox="1"/>
           <p:nvPr/>
         </p:nvSpPr>
@@ -9477,7 +9302,7 @@
       </p:sp>
       <p:sp>
         <p:nvSpPr>
-          <p:cNvPr id="232" name="Text 15"/>
+          <p:cNvPr id="225" name="Text 15"/>
           <p:cNvSpPr txBox="1"/>
           <p:nvPr/>
         </p:nvSpPr>
@@ -9523,7 +9348,7 @@
       </p:sp>
       <p:sp>
         <p:nvSpPr>
-          <p:cNvPr id="233" name="Text 16"/>
+          <p:cNvPr id="226" name="Text 16"/>
           <p:cNvSpPr txBox="1"/>
           <p:nvPr/>
         </p:nvSpPr>
@@ -9569,7 +9394,7 @@
       </p:sp>
       <p:sp>
         <p:nvSpPr>
-          <p:cNvPr id="234" name="Shape 17"/>
+          <p:cNvPr id="227" name="Shape 17"/>
           <p:cNvSpPr/>
           <p:nvPr/>
         </p:nvSpPr>
@@ -9611,7 +9436,7 @@
       </p:sp>
       <p:sp>
         <p:nvSpPr>
-          <p:cNvPr id="235" name="Text 18"/>
+          <p:cNvPr id="228" name="Text 18"/>
           <p:cNvSpPr txBox="1"/>
           <p:nvPr/>
         </p:nvSpPr>
@@ -9657,7 +9482,7 @@
       </p:sp>
       <p:sp>
         <p:nvSpPr>
-          <p:cNvPr id="236" name="Text 19"/>
+          <p:cNvPr id="229" name="Text 19"/>
           <p:cNvSpPr txBox="1"/>
           <p:nvPr/>
         </p:nvSpPr>
@@ -9703,7 +9528,7 @@
       </p:sp>
       <p:sp>
         <p:nvSpPr>
-          <p:cNvPr id="237" name="Text 20"/>
+          <p:cNvPr id="230" name="Text 20"/>
           <p:cNvSpPr txBox="1"/>
           <p:nvPr/>
         </p:nvSpPr>
@@ -9749,7 +9574,7 @@
       </p:sp>
       <p:sp>
         <p:nvSpPr>
-          <p:cNvPr id="238" name="Shape 13"/>
+          <p:cNvPr id="231" name="Shape 13"/>
           <p:cNvSpPr/>
           <p:nvPr/>
         </p:nvSpPr>
@@ -9791,7 +9616,7 @@
       </p:sp>
       <p:sp>
         <p:nvSpPr>
-          <p:cNvPr id="239" name="Text 14"/>
+          <p:cNvPr id="232" name="Text 14"/>
           <p:cNvSpPr txBox="1"/>
           <p:nvPr/>
         </p:nvSpPr>
@@ -9837,7 +9662,7 @@
       </p:sp>
       <p:sp>
         <p:nvSpPr>
-          <p:cNvPr id="240" name="Text 15"/>
+          <p:cNvPr id="233" name="Text 15"/>
           <p:cNvSpPr txBox="1"/>
           <p:nvPr/>
         </p:nvSpPr>
@@ -9883,7 +9708,7 @@
       </p:sp>
       <p:sp>
         <p:nvSpPr>
-          <p:cNvPr id="241" name="Text 16"/>
+          <p:cNvPr id="234" name="Text 16"/>
           <p:cNvSpPr txBox="1"/>
           <p:nvPr/>
         </p:nvSpPr>
@@ -9929,7 +9754,7 @@
       </p:sp>
       <p:sp>
         <p:nvSpPr>
-          <p:cNvPr id="242" name="Shape 13"/>
+          <p:cNvPr id="235" name="Shape 13"/>
           <p:cNvSpPr/>
           <p:nvPr/>
         </p:nvSpPr>
@@ -9971,7 +9796,7 @@
       </p:sp>
       <p:sp>
         <p:nvSpPr>
-          <p:cNvPr id="243" name="Text 14"/>
+          <p:cNvPr id="236" name="Text 14"/>
           <p:cNvSpPr txBox="1"/>
           <p:nvPr/>
         </p:nvSpPr>
@@ -10017,7 +9842,7 @@
       </p:sp>
       <p:sp>
         <p:nvSpPr>
-          <p:cNvPr id="244" name="Text 15"/>
+          <p:cNvPr id="237" name="Text 15"/>
           <p:cNvSpPr txBox="1"/>
           <p:nvPr/>
         </p:nvSpPr>
@@ -10063,7 +9888,7 @@
       </p:sp>
       <p:sp>
         <p:nvSpPr>
-          <p:cNvPr id="245" name="Text 16"/>
+          <p:cNvPr id="238" name="Text 16"/>
           <p:cNvSpPr txBox="1"/>
           <p:nvPr/>
         </p:nvSpPr>
@@ -10109,7 +9934,7 @@
       </p:sp>
       <p:sp>
         <p:nvSpPr>
-          <p:cNvPr id="246" name="Foliennummer"/>
+          <p:cNvPr id="239" name="Foliennummer"/>
           <p:cNvSpPr txBox="1"/>
           <p:nvPr>
             <p:ph type="sldNum" sz="quarter" idx="4294967295"/>
@@ -10147,7 +9972,7 @@
 </p:sld>
 </file>
 
-<file path=ppt/slides/slide17.xml><?xml version="1.0" encoding="utf-8"?>
+<file path=ppt/slides/slide16.xml><?xml version="1.0" encoding="utf-8"?>
 <p:sld xmlns:a="http://schemas.openxmlformats.org/drawingml/2006/main" xmlns:r="http://schemas.openxmlformats.org/officeDocument/2006/relationships" xmlns:p="http://schemas.openxmlformats.org/presentationml/2006/main" xmlns:m="http://schemas.openxmlformats.org/officeDocument/2006/math" xmlns:a14="http://schemas.microsoft.com/office/drawing/2010/main" showMasterSp="1" showMasterPhAnim="1">
   <p:cSld>
     <p:spTree>
@@ -10166,7 +9991,7 @@
       </p:grpSpPr>
       <p:sp>
         <p:nvSpPr>
-          <p:cNvPr id="248" name="Text 1"/>
+          <p:cNvPr id="241" name="Text 1"/>
           <p:cNvSpPr txBox="1"/>
           <p:nvPr/>
         </p:nvSpPr>
@@ -10210,7 +10035,7 @@
       </p:sp>
       <p:sp>
         <p:nvSpPr>
-          <p:cNvPr id="249" name="Text 1"/>
+          <p:cNvPr id="242" name="Text 1"/>
           <p:cNvSpPr txBox="1"/>
           <p:nvPr/>
         </p:nvSpPr>
@@ -10256,7 +10081,7 @@
       </p:sp>
       <p:sp>
         <p:nvSpPr>
-          <p:cNvPr id="250" name="Text 2"/>
+          <p:cNvPr id="243" name="Text 2"/>
           <p:cNvSpPr txBox="1"/>
           <p:nvPr/>
         </p:nvSpPr>
@@ -10298,7 +10123,7 @@
       </p:sp>
       <p:sp>
         <p:nvSpPr>
-          <p:cNvPr id="251" name="Text 3"/>
+          <p:cNvPr id="244" name="Text 3"/>
           <p:cNvSpPr txBox="1"/>
           <p:nvPr/>
         </p:nvSpPr>
@@ -10340,7 +10165,7 @@
       </p:sp>
       <p:sp>
         <p:nvSpPr>
-          <p:cNvPr id="252" name="Text 4"/>
+          <p:cNvPr id="245" name="Text 4"/>
           <p:cNvSpPr txBox="1"/>
           <p:nvPr/>
         </p:nvSpPr>
@@ -10382,7 +10207,7 @@
       </p:sp>
       <p:graphicFrame>
         <p:nvGraphicFramePr>
-          <p:cNvPr id="253" name="Tabelle 1"/>
+          <p:cNvPr id="246" name="Tabelle 1"/>
           <p:cNvGraphicFramePr/>
           <p:nvPr/>
         </p:nvGraphicFramePr>
@@ -10697,7 +10522,7 @@
       </p:graphicFrame>
       <p:sp>
         <p:nvSpPr>
-          <p:cNvPr id="254" name="Text 7"/>
+          <p:cNvPr id="247" name="Text 7"/>
           <p:cNvSpPr txBox="1"/>
           <p:nvPr/>
         </p:nvSpPr>
@@ -10739,7 +10564,7 @@
       </p:sp>
       <p:sp>
         <p:nvSpPr>
-          <p:cNvPr id="255" name="Text 9"/>
+          <p:cNvPr id="248" name="Text 9"/>
           <p:cNvSpPr txBox="1"/>
           <p:nvPr/>
         </p:nvSpPr>
@@ -10783,7 +10608,7 @@
       </p:sp>
       <p:sp>
         <p:nvSpPr>
-          <p:cNvPr id="256" name="Text 10"/>
+          <p:cNvPr id="249" name="Text 10"/>
           <p:cNvSpPr txBox="1"/>
           <p:nvPr/>
         </p:nvSpPr>
@@ -10827,7 +10652,7 @@
       </p:sp>
       <p:sp>
         <p:nvSpPr>
-          <p:cNvPr id="257" name="Text 21"/>
+          <p:cNvPr id="250" name="Text 21"/>
           <p:cNvSpPr txBox="1"/>
           <p:nvPr/>
         </p:nvSpPr>
@@ -10871,7 +10696,7 @@
       </p:sp>
       <p:sp>
         <p:nvSpPr>
-          <p:cNvPr id="258" name="Text 22"/>
+          <p:cNvPr id="251" name="Text 22"/>
           <p:cNvSpPr txBox="1"/>
           <p:nvPr/>
         </p:nvSpPr>
@@ -10915,7 +10740,7 @@
       </p:sp>
       <p:sp>
         <p:nvSpPr>
-          <p:cNvPr id="259" name="Text 2"/>
+          <p:cNvPr id="252" name="Text 2"/>
           <p:cNvSpPr txBox="1"/>
           <p:nvPr/>
         </p:nvSpPr>
@@ -10957,7 +10782,7 @@
       </p:sp>
       <p:sp>
         <p:nvSpPr>
-          <p:cNvPr id="260" name="Text 7"/>
+          <p:cNvPr id="253" name="Text 7"/>
           <p:cNvSpPr txBox="1"/>
           <p:nvPr/>
         </p:nvSpPr>
@@ -10999,7 +10824,7 @@
       </p:sp>
       <p:sp>
         <p:nvSpPr>
-          <p:cNvPr id="261" name="Text 10"/>
+          <p:cNvPr id="254" name="Text 10"/>
           <p:cNvSpPr txBox="1"/>
           <p:nvPr/>
         </p:nvSpPr>
@@ -11048,7 +10873,7 @@
       </p:sp>
       <p:sp>
         <p:nvSpPr>
-          <p:cNvPr id="262" name="Text 10"/>
+          <p:cNvPr id="255" name="Text 10"/>
           <p:cNvSpPr txBox="1"/>
           <p:nvPr/>
         </p:nvSpPr>
@@ -11092,7 +10917,7 @@
       </p:sp>
       <p:sp>
         <p:nvSpPr>
-          <p:cNvPr id="263" name="Text 21"/>
+          <p:cNvPr id="256" name="Text 21"/>
           <p:cNvSpPr txBox="1"/>
           <p:nvPr/>
         </p:nvSpPr>
@@ -11136,7 +10961,7 @@
       </p:sp>
       <p:sp>
         <p:nvSpPr>
-          <p:cNvPr id="264" name="Text 22"/>
+          <p:cNvPr id="257" name="Text 22"/>
           <p:cNvSpPr txBox="1"/>
           <p:nvPr/>
         </p:nvSpPr>
@@ -11180,7 +11005,7 @@
       </p:sp>
       <p:sp>
         <p:nvSpPr>
-          <p:cNvPr id="265" name="Text 7"/>
+          <p:cNvPr id="258" name="Text 7"/>
           <p:cNvSpPr txBox="1"/>
           <p:nvPr/>
         </p:nvSpPr>
@@ -11222,7 +11047,7 @@
       </p:sp>
       <p:sp>
         <p:nvSpPr>
-          <p:cNvPr id="266" name="Text 10"/>
+          <p:cNvPr id="259" name="Text 10"/>
           <p:cNvSpPr txBox="1"/>
           <p:nvPr/>
         </p:nvSpPr>
@@ -11266,7 +11091,7 @@
       </p:sp>
       <p:sp>
         <p:nvSpPr>
-          <p:cNvPr id="267" name="Text 21"/>
+          <p:cNvPr id="260" name="Text 21"/>
           <p:cNvSpPr txBox="1"/>
           <p:nvPr/>
         </p:nvSpPr>
@@ -11310,7 +11135,7 @@
       </p:sp>
       <p:sp>
         <p:nvSpPr>
-          <p:cNvPr id="268" name="Text 22"/>
+          <p:cNvPr id="261" name="Text 22"/>
           <p:cNvSpPr txBox="1"/>
           <p:nvPr/>
         </p:nvSpPr>
@@ -11354,7 +11179,7 @@
       </p:sp>
       <p:sp>
         <p:nvSpPr>
-          <p:cNvPr id="269" name="Text 7"/>
+          <p:cNvPr id="262" name="Text 7"/>
           <p:cNvSpPr txBox="1"/>
           <p:nvPr/>
         </p:nvSpPr>
@@ -11396,7 +11221,7 @@
       </p:sp>
       <p:sp>
         <p:nvSpPr>
-          <p:cNvPr id="270" name="Text 10"/>
+          <p:cNvPr id="263" name="Text 10"/>
           <p:cNvSpPr txBox="1"/>
           <p:nvPr/>
         </p:nvSpPr>
@@ -11440,7 +11265,7 @@
       </p:sp>
       <p:sp>
         <p:nvSpPr>
-          <p:cNvPr id="271" name="Foliennummer"/>
+          <p:cNvPr id="264" name="Foliennummer"/>
           <p:cNvSpPr txBox="1"/>
           <p:nvPr>
             <p:ph type="sldNum" sz="quarter" idx="4294967295"/>
@@ -11478,7 +11303,395 @@
 </p:sld>
 </file>
 
+<file path=ppt/slides/slide17.xml><?xml version="1.0" encoding="utf-8"?>
+<p:sld xmlns:a="http://schemas.openxmlformats.org/drawingml/2006/main" xmlns:r="http://schemas.openxmlformats.org/officeDocument/2006/relationships" xmlns:p="http://schemas.openxmlformats.org/presentationml/2006/main" xmlns:m="http://schemas.openxmlformats.org/officeDocument/2006/math" xmlns:a14="http://schemas.microsoft.com/office/drawing/2010/main" showMasterSp="1" showMasterPhAnim="1">
+  <p:cSld>
+    <p:spTree>
+      <p:nvGrpSpPr>
+        <p:cNvPr id="1" name=""/>
+        <p:cNvGrpSpPr/>
+        <p:nvPr/>
+      </p:nvGrpSpPr>
+      <p:grpSpPr>
+        <a:xfrm>
+          <a:off x="0" y="0"/>
+          <a:ext cx="0" cy="0"/>
+          <a:chOff x="0" y="0"/>
+          <a:chExt cx="0" cy="0"/>
+        </a:xfrm>
+      </p:grpSpPr>
+      <p:sp>
+        <p:nvSpPr>
+          <p:cNvPr id="266" name="Text 1"/>
+          <p:cNvSpPr txBox="1"/>
+          <p:nvPr/>
+        </p:nvSpPr>
+        <p:spPr>
+          <a:xfrm>
+            <a:off x="658368" y="566927"/>
+            <a:ext cx="8138160" cy="530353"/>
+          </a:xfrm>
+          <a:prstGeom prst="rect">
+            <a:avLst/>
+          </a:prstGeom>
+          <a:ln w="12700">
+            <a:miter lim="400000"/>
+          </a:ln>
+          <a:extLst>
+            <a:ext uri="{C572A759-6A51-4108-AA02-DFA0A04FC94B}">
+              <ma14:wrappingTextBoxFlag xmlns:ma14="http://schemas.microsoft.com/office/mac/drawingml/2011/main" val="1"/>
+            </a:ext>
+          </a:extLst>
+        </p:spPr>
+        <p:txBody>
+          <a:bodyPr lIns="253" tIns="253" rIns="253" bIns="253" anchor="ctr">
+            <a:normAutofit fontScale="100000" lnSpcReduction="0"/>
+          </a:bodyPr>
+          <a:lstStyle>
+            <a:lvl1pPr>
+              <a:defRPr b="1" sz="2700">
+                <a:solidFill>
+                  <a:srgbClr val="1E2B4A"/>
+                </a:solidFill>
+              </a:defRPr>
+            </a:lvl1pPr>
+          </a:lstStyle>
+          <a:p>
+            <a:pPr/>
+            <a:r>
+              <a:t>Fazit</a:t>
+            </a:r>
+          </a:p>
+        </p:txBody>
+      </p:sp>
+      <p:sp>
+        <p:nvSpPr>
+          <p:cNvPr id="267" name="Ein Machine-Learning-Modell konnte zur Vorhersage des Hypertonie-Status auf Basis individueller NHANES-Daten aufgebaut werden.…"/>
+          <p:cNvSpPr txBox="1"/>
+          <p:nvPr/>
+        </p:nvSpPr>
+        <p:spPr>
+          <a:xfrm>
+            <a:off x="835698" y="1631340"/>
+            <a:ext cx="9954153" cy="1669633"/>
+          </a:xfrm>
+          <a:prstGeom prst="rect">
+            <a:avLst/>
+          </a:prstGeom>
+          <a:ln w="12700">
+            <a:miter lim="400000"/>
+          </a:ln>
+          <a:extLst>
+            <a:ext uri="{C572A759-6A51-4108-AA02-DFA0A04FC94B}">
+              <ma14:wrappingTextBoxFlag xmlns:ma14="http://schemas.microsoft.com/office/mac/drawingml/2011/main" val="1"/>
+            </a:ext>
+          </a:extLst>
+        </p:spPr>
+        <p:txBody>
+          <a:bodyPr lIns="45719" rIns="45719">
+            <a:spAutoFit/>
+          </a:bodyPr>
+          <a:lstStyle/>
+          <a:p>
+            <a:pPr marL="140368" indent="-140368" defTabSz="12700">
+              <a:lnSpc>
+                <a:spcPct val="135000"/>
+              </a:lnSpc>
+              <a:buSzPct val="100000"/>
+              <a:buChar char="•"/>
+              <a:defRPr sz="1400"/>
+            </a:pPr>
+            <a:r>
+              <a:t>Ein Machine-Learning-Modell konnte zur Vorhersage des Hypertonie-Status auf Basis individueller NHANES-Daten aufgebaut werden.</a:t>
+            </a:r>
+          </a:p>
+          <a:p>
+            <a:pPr marL="140368" indent="-140368" defTabSz="12700">
+              <a:lnSpc>
+                <a:spcPct val="135000"/>
+              </a:lnSpc>
+              <a:buSzPct val="100000"/>
+              <a:buChar char="•"/>
+              <a:defRPr sz="1400"/>
+            </a:pPr>
+            <a:r>
+              <a:t>Die logistische Regression zeigte sich als gut interpretierbares Modell für die Risikoeinschätzung.</a:t>
+            </a:r>
+          </a:p>
+          <a:p>
+            <a:pPr marL="140368" indent="-140368" defTabSz="12700">
+              <a:lnSpc>
+                <a:spcPct val="135000"/>
+              </a:lnSpc>
+              <a:buSzPct val="100000"/>
+              <a:buChar char="•"/>
+              <a:defRPr sz="1400"/>
+            </a:pPr>
+            <a:r>
+              <a:t>Besonders </a:t>
+            </a:r>
+            <a:r>
+              <a:rPr b="1"/>
+              <a:t>Alter</a:t>
+            </a:r>
+            <a:r>
+              <a:t> und </a:t>
+            </a:r>
+            <a:r>
+              <a:rPr b="1"/>
+              <a:t>Taillenumfang</a:t>
+            </a:r>
+            <a:r>
+              <a:t> hatten einen starken Einfluss auf die Vorhersage.</a:t>
+            </a:r>
+          </a:p>
+          <a:p>
+            <a:pPr marL="140368" indent="-140368" defTabSz="12700">
+              <a:lnSpc>
+                <a:spcPct val="135000"/>
+              </a:lnSpc>
+              <a:buSzPct val="100000"/>
+              <a:buChar char="•"/>
+              <a:defRPr sz="1400"/>
+            </a:pPr>
+            <a:r>
+              <a:t>Durch die Anpassung des Schwellenwertes konnten mehr tatsächliche Hypertonie-Fälle erkannt werden.</a:t>
+            </a:r>
+          </a:p>
+          <a:p>
+            <a:pPr marL="140368" indent="-140368" defTabSz="12700">
+              <a:lnSpc>
+                <a:spcPct val="135000"/>
+              </a:lnSpc>
+              <a:buSzPct val="100000"/>
+              <a:buChar char="•"/>
+              <a:defRPr sz="1400"/>
+            </a:pPr>
+            <a:r>
+              <a:t>Das Modell liefert eine datenbasierte Risikoeinschätzung, ersetzt aber keine medizinische Diagnose.</a:t>
+            </a:r>
+          </a:p>
+        </p:txBody>
+      </p:sp>
+      <p:sp>
+        <p:nvSpPr>
+          <p:cNvPr id="268" name="Foliennummer"/>
+          <p:cNvSpPr txBox="1"/>
+          <p:nvPr>
+            <p:ph type="sldNum" sz="quarter" idx="4294967295"/>
+          </p:nvPr>
+        </p:nvSpPr>
+        <p:spPr>
+          <a:xfrm>
+            <a:off x="11567159" y="6473952"/>
+            <a:ext cx="202998" cy="190551"/>
+          </a:xfrm>
+          <a:prstGeom prst="rect">
+            <a:avLst/>
+          </a:prstGeom>
+          <a:extLst>
+            <a:ext uri="{C572A759-6A51-4108-AA02-DFA0A04FC94B}">
+              <ma14:wrappingTextBoxFlag xmlns:ma14="http://schemas.microsoft.com/office/mac/drawingml/2011/main" val="1"/>
+            </a:ext>
+          </a:extLst>
+        </p:spPr>
+        <p:txBody>
+          <a:bodyPr/>
+          <a:lstStyle/>
+          <a:p>
+            <a:pPr/>
+            <a:fld id="{86CB4B4D-7CA3-9044-876B-883B54F8677D}" type="slidenum"/>
+          </a:p>
+        </p:txBody>
+      </p:sp>
+    </p:spTree>
+  </p:cSld>
+  <p:clrMapOvr>
+    <a:masterClrMapping/>
+  </p:clrMapOvr>
+  <p:transition xmlns:p14="http://schemas.microsoft.com/office/powerpoint/2010/main" spd="med" advClick="1"/>
+</p:sld>
+</file>
+
 <file path=ppt/slides/slide18.xml><?xml version="1.0" encoding="utf-8"?>
+<p:sld xmlns:a="http://schemas.openxmlformats.org/drawingml/2006/main" xmlns:r="http://schemas.openxmlformats.org/officeDocument/2006/relationships" xmlns:p="http://schemas.openxmlformats.org/presentationml/2006/main" xmlns:m="http://schemas.openxmlformats.org/officeDocument/2006/math" xmlns:a14="http://schemas.microsoft.com/office/drawing/2010/main" showMasterSp="1" showMasterPhAnim="1">
+  <p:cSld>
+    <p:spTree>
+      <p:nvGrpSpPr>
+        <p:cNvPr id="1" name=""/>
+        <p:cNvGrpSpPr/>
+        <p:nvPr/>
+      </p:nvGrpSpPr>
+      <p:grpSpPr>
+        <a:xfrm>
+          <a:off x="0" y="0"/>
+          <a:ext cx="0" cy="0"/>
+          <a:chOff x="0" y="0"/>
+          <a:chExt cx="0" cy="0"/>
+        </a:xfrm>
+      </p:grpSpPr>
+      <p:sp>
+        <p:nvSpPr>
+          <p:cNvPr id="270" name="Vielen Dank für Ihre Aufmerksamkeit…"/>
+          <p:cNvSpPr txBox="1"/>
+          <p:nvPr/>
+        </p:nvSpPr>
+        <p:spPr>
+          <a:xfrm>
+            <a:off x="3053841" y="2858187"/>
+            <a:ext cx="6084317" cy="1141626"/>
+          </a:xfrm>
+          <a:prstGeom prst="rect">
+            <a:avLst/>
+          </a:prstGeom>
+          <a:ln w="12700">
+            <a:miter lim="400000"/>
+          </a:ln>
+          <a:extLst>
+            <a:ext uri="{C572A759-6A51-4108-AA02-DFA0A04FC94B}">
+              <ma14:wrappingTextBoxFlag xmlns:ma14="http://schemas.microsoft.com/office/mac/drawingml/2011/main" val="1"/>
+            </a:ext>
+          </a:extLst>
+        </p:spPr>
+        <p:txBody>
+          <a:bodyPr wrap="none" lIns="45719" rIns="45719">
+            <a:spAutoFit/>
+          </a:bodyPr>
+          <a:lstStyle/>
+          <a:p>
+            <a:pPr defTabSz="12700">
+              <a:lnSpc>
+                <a:spcPct val="135000"/>
+              </a:lnSpc>
+              <a:tabLst>
+                <a:tab pos="355600" algn="l"/>
+                <a:tab pos="711200" algn="l"/>
+                <a:tab pos="1066800" algn="l"/>
+                <a:tab pos="1422400" algn="l"/>
+                <a:tab pos="1778000" algn="l"/>
+                <a:tab pos="2133600" algn="l"/>
+                <a:tab pos="2489200" algn="l"/>
+                <a:tab pos="2844800" algn="l"/>
+                <a:tab pos="3200400" algn="l"/>
+                <a:tab pos="3556000" algn="l"/>
+                <a:tab pos="3911600" algn="l"/>
+                <a:tab pos="4267200" algn="l"/>
+              </a:tabLst>
+              <a:defRPr b="1" sz="2700">
+                <a:solidFill>
+                  <a:srgbClr val="212B48"/>
+                </a:solidFill>
+              </a:defRPr>
+            </a:pPr>
+            <a:r>
+              <a:t>Vielen Dank für Ihre Aufmerksamkeit</a:t>
+            </a:r>
+          </a:p>
+          <a:p>
+            <a:pPr defTabSz="12700">
+              <a:lnSpc>
+                <a:spcPct val="135000"/>
+              </a:lnSpc>
+              <a:tabLst>
+                <a:tab pos="355600" algn="l"/>
+                <a:tab pos="711200" algn="l"/>
+                <a:tab pos="1066800" algn="l"/>
+                <a:tab pos="1422400" algn="l"/>
+                <a:tab pos="1778000" algn="l"/>
+                <a:tab pos="2133600" algn="l"/>
+                <a:tab pos="2489200" algn="l"/>
+                <a:tab pos="2844800" algn="l"/>
+                <a:tab pos="3200400" algn="l"/>
+                <a:tab pos="3556000" algn="l"/>
+                <a:tab pos="3911600" algn="l"/>
+                <a:tab pos="4267200" algn="l"/>
+              </a:tabLst>
+              <a:defRPr b="1" sz="1400"/>
+            </a:pPr>
+          </a:p>
+          <a:p>
+            <a:pPr algn="ctr" defTabSz="12700">
+              <a:lnSpc>
+                <a:spcPct val="135000"/>
+              </a:lnSpc>
+              <a:tabLst>
+                <a:tab pos="355600" algn="l"/>
+                <a:tab pos="711200" algn="l"/>
+                <a:tab pos="1066800" algn="l"/>
+                <a:tab pos="1422400" algn="l"/>
+                <a:tab pos="1778000" algn="l"/>
+                <a:tab pos="2133600" algn="l"/>
+                <a:tab pos="2489200" algn="l"/>
+                <a:tab pos="2844800" algn="l"/>
+                <a:tab pos="3200400" algn="l"/>
+                <a:tab pos="3556000" algn="l"/>
+                <a:tab pos="3911600" algn="l"/>
+                <a:tab pos="4267200" algn="l"/>
+              </a:tabLst>
+              <a:defRPr i="1" sz="1400"/>
+            </a:pPr>
+            <a:r>
+              <a:t>Wir freuen uns auf Ihre Fragen.</a:t>
+            </a:r>
+          </a:p>
+        </p:txBody>
+      </p:sp>
+      <p:sp>
+        <p:nvSpPr>
+          <p:cNvPr id="271" name="Rectangle 19"/>
+          <p:cNvSpPr/>
+          <p:nvPr/>
+        </p:nvSpPr>
+        <p:spPr>
+          <a:xfrm>
+            <a:off x="4029455" y="3494278"/>
+            <a:ext cx="4480561" cy="32005"/>
+          </a:xfrm>
+          <a:prstGeom prst="rect">
+            <a:avLst/>
+          </a:prstGeom>
+          <a:solidFill>
+            <a:srgbClr val="158BB8"/>
+          </a:solidFill>
+          <a:ln w="12700">
+            <a:miter lim="400000"/>
+          </a:ln>
+          <a:effectLst>
+            <a:outerShdw sx="100000" sy="100000" kx="0" ky="0" algn="b" rotWithShape="0" blurRad="38100" dist="23000" dir="5400000">
+              <a:srgbClr val="000000">
+                <a:alpha val="35000"/>
+              </a:srgbClr>
+            </a:outerShdw>
+          </a:effectLst>
+        </p:spPr>
+        <p:txBody>
+          <a:bodyPr lIns="45719" rIns="45719" anchor="ctr"/>
+          <a:lstStyle/>
+          <a:p>
+            <a:pPr algn="ctr" defTabSz="457200">
+              <a:defRPr>
+                <a:solidFill>
+                  <a:srgbClr val="FFFFFF"/>
+                </a:solidFill>
+                <a:latin typeface="Calibri"/>
+                <a:ea typeface="Calibri"/>
+                <a:cs typeface="Calibri"/>
+                <a:sym typeface="Calibri"/>
+              </a:defRPr>
+            </a:pPr>
+          </a:p>
+        </p:txBody>
+      </p:sp>
+    </p:spTree>
+  </p:cSld>
+  <p:clrMapOvr>
+    <a:masterClrMapping/>
+  </p:clrMapOvr>
+  <p:transition xmlns:p14="http://schemas.microsoft.com/office/powerpoint/2010/main" spd="med" advClick="1"/>
+</p:sld>
+</file>
+
+<file path=ppt/slides/slide19.xml><?xml version="1.0" encoding="utf-8"?>
 <p:sld xmlns:a="http://schemas.openxmlformats.org/drawingml/2006/main" xmlns:r="http://schemas.openxmlformats.org/officeDocument/2006/relationships" xmlns:p="http://schemas.openxmlformats.org/presentationml/2006/main" xmlns:m="http://schemas.openxmlformats.org/officeDocument/2006/math" xmlns:a14="http://schemas.microsoft.com/office/drawing/2010/main" showMasterSp="1" showMasterPhAnim="1">
   <p:cSld>
     <p:spTree>
@@ -11534,21 +11747,21 @@
           <a:p>
             <a:pPr/>
             <a:r>
-              <a:t>Fazit</a:t>
+              <a:t>Quellen</a:t>
             </a:r>
           </a:p>
         </p:txBody>
       </p:sp>
       <p:sp>
         <p:nvSpPr>
-          <p:cNvPr id="274" name="Ein Machine-Learning-Modell konnte zur Vorhersage des Hypertonie-Status auf Basis individueller NHANES-Daten aufgebaut werden.…"/>
+          <p:cNvPr id="274" name="Bilder:…"/>
           <p:cNvSpPr txBox="1"/>
           <p:nvPr/>
         </p:nvSpPr>
         <p:spPr>
           <a:xfrm>
-            <a:off x="835698" y="1631340"/>
-            <a:ext cx="9954153" cy="1669633"/>
+            <a:off x="805218" y="1397660"/>
+            <a:ext cx="10254552" cy="2485818"/>
           </a:xfrm>
           <a:prstGeom prst="rect">
             <a:avLst/>
@@ -11568,176 +11781,74 @@
           </a:bodyPr>
           <a:lstStyle/>
           <a:p>
+            <a:pPr>
+              <a:defRPr b="1" sz="1400">
+                <a:solidFill>
+                  <a:srgbClr val="212B48"/>
+                </a:solidFill>
+              </a:defRPr>
+            </a:pPr>
+            <a:r>
+              <a:t>Bilder:</a:t>
+            </a:r>
+          </a:p>
+          <a:p>
+            <a:pPr marL="130342" indent="-130342">
+              <a:buSzPct val="100000"/>
+              <a:buChar char="•"/>
+              <a:defRPr sz="1400"/>
+            </a:pPr>
+            <a:r>
+              <a:rPr>
+                <a:uFill>
+                  <a:solidFill>
+                    <a:srgbClr val="0563C1"/>
+                  </a:solidFill>
+                </a:uFill>
+                <a:hlinkClick r:id="rId2" invalidUrl="" action="" tgtFrame="" tooltip="" history="1" highlightClick="0" endSnd="0"/>
+              </a:rPr>
+              <a:t>https://www.magnific.com/de/vektoren-premium/hypotonie-hypertonie-krankheit-winziger-kardiologe-der-bluthochdruck-mit-tonometer-misst-arzt-beraet-aeltere-patienten-zu-kardiologischen-erkrankungen-aerztliche-untersuchung-kardiologische-untersuchung_18961593.htm</a:t>
+            </a:r>
+          </a:p>
+          <a:p>
+            <a:pPr>
+              <a:defRPr sz="1400"/>
+            </a:pPr>
+          </a:p>
+          <a:p>
+            <a:pPr>
+              <a:defRPr sz="1400"/>
+            </a:pPr>
+          </a:p>
+          <a:p>
+            <a:pPr>
+              <a:defRPr b="1" sz="1400">
+                <a:solidFill>
+                  <a:srgbClr val="212B48"/>
+                </a:solidFill>
+              </a:defRPr>
+            </a:pPr>
+            <a:r>
+              <a:t>Daten:</a:t>
+            </a:r>
+          </a:p>
+          <a:p>
+            <a:pPr marL="130342" indent="-130342">
+              <a:buSzPct val="100000"/>
+              <a:buChar char="•"/>
+              <a:defRPr sz="1400"/>
+            </a:pPr>
+            <a:r>
+              <a:t>https://ourworldindata.org/grapher/hypertension-adults-30-79.csv</a:t>
+            </a:r>
+          </a:p>
+          <a:p>
             <a:pPr marL="140368" indent="-140368" defTabSz="12700">
               <a:lnSpc>
                 <a:spcPct val="135000"/>
               </a:lnSpc>
               <a:buSzPct val="100000"/>
               <a:buChar char="•"/>
-              <a:defRPr sz="1400"/>
-            </a:pPr>
-            <a:r>
-              <a:t>Ein Machine-Learning-Modell konnte zur Vorhersage des Hypertonie-Status auf Basis individueller NHANES-Daten aufgebaut werden.</a:t>
-            </a:r>
-          </a:p>
-          <a:p>
-            <a:pPr marL="140368" indent="-140368" defTabSz="12700">
-              <a:lnSpc>
-                <a:spcPct val="135000"/>
-              </a:lnSpc>
-              <a:buSzPct val="100000"/>
-              <a:buChar char="•"/>
-              <a:defRPr sz="1400"/>
-            </a:pPr>
-            <a:r>
-              <a:t>Die logistische Regression zeigte sich als gut interpretierbares Modell für die Risikoeinschätzung.</a:t>
-            </a:r>
-          </a:p>
-          <a:p>
-            <a:pPr marL="140368" indent="-140368" defTabSz="12700">
-              <a:lnSpc>
-                <a:spcPct val="135000"/>
-              </a:lnSpc>
-              <a:buSzPct val="100000"/>
-              <a:buChar char="•"/>
-              <a:defRPr sz="1400"/>
-            </a:pPr>
-            <a:r>
-              <a:t>Besonders </a:t>
-            </a:r>
-            <a:r>
-              <a:rPr b="1"/>
-              <a:t>Alter</a:t>
-            </a:r>
-            <a:r>
-              <a:t> und </a:t>
-            </a:r>
-            <a:r>
-              <a:rPr b="1"/>
-              <a:t>Taillenumfang</a:t>
-            </a:r>
-            <a:r>
-              <a:t> hatten einen starken Einfluss auf die Vorhersage.</a:t>
-            </a:r>
-          </a:p>
-          <a:p>
-            <a:pPr marL="140368" indent="-140368" defTabSz="12700">
-              <a:lnSpc>
-                <a:spcPct val="135000"/>
-              </a:lnSpc>
-              <a:buSzPct val="100000"/>
-              <a:buChar char="•"/>
-              <a:defRPr sz="1400"/>
-            </a:pPr>
-            <a:r>
-              <a:t>Durch die Anpassung des Schwellenwertes konnten mehr tatsächliche Hypertonie-Fälle erkannt werden.</a:t>
-            </a:r>
-          </a:p>
-          <a:p>
-            <a:pPr marL="140368" indent="-140368" defTabSz="12700">
-              <a:lnSpc>
-                <a:spcPct val="135000"/>
-              </a:lnSpc>
-              <a:buSzPct val="100000"/>
-              <a:buChar char="•"/>
-              <a:defRPr sz="1400"/>
-            </a:pPr>
-            <a:r>
-              <a:t>Das Modell liefert eine datenbasierte Risikoeinschätzung, ersetzt aber keine medizinische Diagnose.</a:t>
-            </a:r>
-          </a:p>
-        </p:txBody>
-      </p:sp>
-      <p:sp>
-        <p:nvSpPr>
-          <p:cNvPr id="275" name="Foliennummer"/>
-          <p:cNvSpPr txBox="1"/>
-          <p:nvPr>
-            <p:ph type="sldNum" sz="quarter" idx="4294967295"/>
-          </p:nvPr>
-        </p:nvSpPr>
-        <p:spPr>
-          <a:xfrm>
-            <a:off x="11567159" y="6473952"/>
-            <a:ext cx="202998" cy="190551"/>
-          </a:xfrm>
-          <a:prstGeom prst="rect">
-            <a:avLst/>
-          </a:prstGeom>
-          <a:extLst>
-            <a:ext uri="{C572A759-6A51-4108-AA02-DFA0A04FC94B}">
-              <ma14:wrappingTextBoxFlag xmlns:ma14="http://schemas.microsoft.com/office/mac/drawingml/2011/main" val="1"/>
-            </a:ext>
-          </a:extLst>
-        </p:spPr>
-        <p:txBody>
-          <a:bodyPr/>
-          <a:lstStyle/>
-          <a:p>
-            <a:pPr/>
-            <a:fld id="{86CB4B4D-7CA3-9044-876B-883B54F8677D}" type="slidenum"/>
-          </a:p>
-        </p:txBody>
-      </p:sp>
-    </p:spTree>
-  </p:cSld>
-  <p:clrMapOvr>
-    <a:masterClrMapping/>
-  </p:clrMapOvr>
-  <p:transition xmlns:p14="http://schemas.microsoft.com/office/powerpoint/2010/main" spd="med" advClick="1"/>
-</p:sld>
-</file>
-
-<file path=ppt/slides/slide19.xml><?xml version="1.0" encoding="utf-8"?>
-<p:sld xmlns:a="http://schemas.openxmlformats.org/drawingml/2006/main" xmlns:r="http://schemas.openxmlformats.org/officeDocument/2006/relationships" xmlns:p="http://schemas.openxmlformats.org/presentationml/2006/main" xmlns:m="http://schemas.openxmlformats.org/officeDocument/2006/math" xmlns:a14="http://schemas.microsoft.com/office/drawing/2010/main" showMasterSp="1" showMasterPhAnim="1">
-  <p:cSld>
-    <p:spTree>
-      <p:nvGrpSpPr>
-        <p:cNvPr id="1" name=""/>
-        <p:cNvGrpSpPr/>
-        <p:nvPr/>
-      </p:nvGrpSpPr>
-      <p:grpSpPr>
-        <a:xfrm>
-          <a:off x="0" y="0"/>
-          <a:ext cx="0" cy="0"/>
-          <a:chOff x="0" y="0"/>
-          <a:chExt cx="0" cy="0"/>
-        </a:xfrm>
-      </p:grpSpPr>
-      <p:sp>
-        <p:nvSpPr>
-          <p:cNvPr id="277" name="Vielen Dank für Ihre Aufmerksamkeit…"/>
-          <p:cNvSpPr txBox="1"/>
-          <p:nvPr/>
-        </p:nvSpPr>
-        <p:spPr>
-          <a:xfrm>
-            <a:off x="3053841" y="2858187"/>
-            <a:ext cx="6084317" cy="1141626"/>
-          </a:xfrm>
-          <a:prstGeom prst="rect">
-            <a:avLst/>
-          </a:prstGeom>
-          <a:ln w="12700">
-            <a:miter lim="400000"/>
-          </a:ln>
-          <a:extLst>
-            <a:ext uri="{C572A759-6A51-4108-AA02-DFA0A04FC94B}">
-              <ma14:wrappingTextBoxFlag xmlns:ma14="http://schemas.microsoft.com/office/mac/drawingml/2011/main" val="1"/>
-            </a:ext>
-          </a:extLst>
-        </p:spPr>
-        <p:txBody>
-          <a:bodyPr wrap="none" lIns="45719" rIns="45719">
-            <a:spAutoFit/>
-          </a:bodyPr>
-          <a:lstStyle/>
-          <a:p>
-            <a:pPr defTabSz="12700">
-              <a:lnSpc>
-                <a:spcPct val="135000"/>
-              </a:lnSpc>
               <a:tabLst>
                 <a:tab pos="355600" algn="l"/>
                 <a:tab pos="711200" algn="l"/>
@@ -11752,21 +11863,27 @@
                 <a:tab pos="3911600" algn="l"/>
                 <a:tab pos="4267200" algn="l"/>
               </a:tabLst>
-              <a:defRPr b="1" sz="2700">
-                <a:solidFill>
-                  <a:srgbClr val="212B48"/>
-                </a:solidFill>
-              </a:defRPr>
+              <a:defRPr sz="1400"/>
             </a:pPr>
             <a:r>
-              <a:t>Vielen Dank für Ihre Aufmerksamkeit</a:t>
-            </a:r>
-          </a:p>
-          <a:p>
-            <a:pPr defTabSz="12700">
+              <a:rPr>
+                <a:uFill>
+                  <a:solidFill>
+                    <a:srgbClr val="0563C1"/>
+                  </a:solidFill>
+                </a:uFill>
+                <a:hlinkClick r:id="rId3" invalidUrl="" action="" tgtFrame="" tooltip="" history="1" highlightClick="0" endSnd="0"/>
+              </a:rPr>
+              <a:t>https://ourworldindata.org/grapher/women-high-blood-pressure.csv</a:t>
+            </a:r>
+          </a:p>
+          <a:p>
+            <a:pPr marL="140368" indent="-140368" defTabSz="12700">
               <a:lnSpc>
                 <a:spcPct val="135000"/>
               </a:lnSpc>
+              <a:buSzPct val="100000"/>
+              <a:buChar char="•"/>
               <a:tabLst>
                 <a:tab pos="355600" algn="l"/>
                 <a:tab pos="711200" algn="l"/>
@@ -11781,14 +11898,19 @@
                 <a:tab pos="3911600" algn="l"/>
                 <a:tab pos="4267200" algn="l"/>
               </a:tabLst>
-              <a:defRPr b="1" sz="1400"/>
+              <a:defRPr sz="1400"/>
             </a:pPr>
-          </a:p>
-          <a:p>
-            <a:pPr algn="ctr" defTabSz="12700">
+            <a:r>
+              <a:t>https://ourworldindata.org/grapher/male-high-blood-pressure.csv</a:t>
+            </a:r>
+          </a:p>
+          <a:p>
+            <a:pPr marL="140368" indent="-140368" defTabSz="12700">
               <a:lnSpc>
                 <a:spcPct val="135000"/>
               </a:lnSpc>
+              <a:buSzPct val="100000"/>
+              <a:buChar char="•"/>
               <a:tabLst>
                 <a:tab pos="355600" algn="l"/>
                 <a:tab pos="711200" algn="l"/>
@@ -11803,57 +11925,11 @@
                 <a:tab pos="3911600" algn="l"/>
                 <a:tab pos="4267200" algn="l"/>
               </a:tabLst>
-              <a:defRPr i="1" sz="1400"/>
+              <a:defRPr sz="1400"/>
             </a:pPr>
             <a:r>
-              <a:t>Wir freuen uns auf Ihre Fragen.</a:t>
-            </a:r>
-          </a:p>
-        </p:txBody>
-      </p:sp>
-      <p:sp>
-        <p:nvSpPr>
-          <p:cNvPr id="278" name="Rectangle 19"/>
-          <p:cNvSpPr/>
-          <p:nvPr/>
-        </p:nvSpPr>
-        <p:spPr>
-          <a:xfrm>
-            <a:off x="4029455" y="3494277"/>
-            <a:ext cx="4480561" cy="32005"/>
-          </a:xfrm>
-          <a:prstGeom prst="rect">
-            <a:avLst/>
-          </a:prstGeom>
-          <a:solidFill>
-            <a:srgbClr val="158BB8"/>
-          </a:solidFill>
-          <a:ln w="12700">
-            <a:miter lim="400000"/>
-          </a:ln>
-          <a:effectLst>
-            <a:outerShdw sx="100000" sy="100000" kx="0" ky="0" algn="b" rotWithShape="0" blurRad="38100" dist="23000" dir="5400000">
-              <a:srgbClr val="000000">
-                <a:alpha val="35000"/>
-              </a:srgbClr>
-            </a:outerShdw>
-          </a:effectLst>
-        </p:spPr>
-        <p:txBody>
-          <a:bodyPr lIns="45719" rIns="45719" anchor="ctr"/>
-          <a:lstStyle/>
-          <a:p>
-            <a:pPr algn="ctr" defTabSz="457200">
-              <a:defRPr>
-                <a:solidFill>
-                  <a:srgbClr val="FFFFFF"/>
-                </a:solidFill>
-                <a:latin typeface="Calibri"/>
-                <a:ea typeface="Calibri"/>
-                <a:cs typeface="Calibri"/>
-                <a:sym typeface="Calibri"/>
-              </a:defRPr>
-            </a:pPr>
+              <a:t>https://ourworldindata.org/grapher/death-rate-from-hypertensive-heart-disease-who-ghe-age-standardized.csv</a:t>
+            </a:r>
           </a:p>
         </p:txBody>
       </p:sp>
@@ -11935,8 +12011,8 @@
         </p:nvGrpSpPr>
         <p:grpSpPr>
           <a:xfrm>
-            <a:off x="665075" y="4008119"/>
-            <a:ext cx="8124746" cy="2056974"/>
+            <a:off x="665075" y="4008120"/>
+            <a:ext cx="8124746" cy="2056973"/>
             <a:chOff x="0" y="0"/>
             <a:chExt cx="8124745" cy="2056972"/>
           </a:xfrm>
@@ -12312,994 +12388,7 @@
 </p:sld>
 </file>
 
-<file path=ppt/slides/slide20.xml><?xml version="1.0" encoding="utf-8"?>
-<p:sld xmlns:a="http://schemas.openxmlformats.org/drawingml/2006/main" xmlns:r="http://schemas.openxmlformats.org/officeDocument/2006/relationships" xmlns:p="http://schemas.openxmlformats.org/presentationml/2006/main" xmlns:m="http://schemas.openxmlformats.org/officeDocument/2006/math" xmlns:a14="http://schemas.microsoft.com/office/drawing/2010/main" showMasterSp="1" showMasterPhAnim="1">
-  <p:cSld>
-    <p:spTree>
-      <p:nvGrpSpPr>
-        <p:cNvPr id="1" name=""/>
-        <p:cNvGrpSpPr/>
-        <p:nvPr/>
-      </p:nvGrpSpPr>
-      <p:grpSpPr>
-        <a:xfrm>
-          <a:off x="0" y="0"/>
-          <a:ext cx="0" cy="0"/>
-          <a:chOff x="0" y="0"/>
-          <a:chExt cx="0" cy="0"/>
-        </a:xfrm>
-      </p:grpSpPr>
-      <p:sp>
-        <p:nvSpPr>
-          <p:cNvPr id="280" name="Text 1"/>
-          <p:cNvSpPr txBox="1"/>
-          <p:nvPr/>
-        </p:nvSpPr>
-        <p:spPr>
-          <a:xfrm>
-            <a:off x="658368" y="566927"/>
-            <a:ext cx="8138160" cy="530353"/>
-          </a:xfrm>
-          <a:prstGeom prst="rect">
-            <a:avLst/>
-          </a:prstGeom>
-          <a:ln w="12700">
-            <a:miter lim="400000"/>
-          </a:ln>
-          <a:extLst>
-            <a:ext uri="{C572A759-6A51-4108-AA02-DFA0A04FC94B}">
-              <ma14:wrappingTextBoxFlag xmlns:ma14="http://schemas.microsoft.com/office/mac/drawingml/2011/main" val="1"/>
-            </a:ext>
-          </a:extLst>
-        </p:spPr>
-        <p:txBody>
-          <a:bodyPr lIns="253" tIns="253" rIns="253" bIns="253" anchor="ctr">
-            <a:normAutofit fontScale="100000" lnSpcReduction="0"/>
-          </a:bodyPr>
-          <a:lstStyle>
-            <a:lvl1pPr>
-              <a:defRPr b="1" sz="2700">
-                <a:solidFill>
-                  <a:srgbClr val="1E2B4A"/>
-                </a:solidFill>
-              </a:defRPr>
-            </a:lvl1pPr>
-          </a:lstStyle>
-          <a:p>
-            <a:pPr/>
-            <a:r>
-              <a:t>Quellen</a:t>
-            </a:r>
-          </a:p>
-        </p:txBody>
-      </p:sp>
-      <p:sp>
-        <p:nvSpPr>
-          <p:cNvPr id="281" name="Bilder:…"/>
-          <p:cNvSpPr txBox="1"/>
-          <p:nvPr/>
-        </p:nvSpPr>
-        <p:spPr>
-          <a:xfrm>
-            <a:off x="805218" y="1397660"/>
-            <a:ext cx="10254552" cy="2485818"/>
-          </a:xfrm>
-          <a:prstGeom prst="rect">
-            <a:avLst/>
-          </a:prstGeom>
-          <a:ln w="12700">
-            <a:miter lim="400000"/>
-          </a:ln>
-          <a:extLst>
-            <a:ext uri="{C572A759-6A51-4108-AA02-DFA0A04FC94B}">
-              <ma14:wrappingTextBoxFlag xmlns:ma14="http://schemas.microsoft.com/office/mac/drawingml/2011/main" val="1"/>
-            </a:ext>
-          </a:extLst>
-        </p:spPr>
-        <p:txBody>
-          <a:bodyPr lIns="45719" rIns="45719">
-            <a:spAutoFit/>
-          </a:bodyPr>
-          <a:lstStyle/>
-          <a:p>
-            <a:pPr>
-              <a:defRPr b="1" sz="1400">
-                <a:solidFill>
-                  <a:srgbClr val="212B48"/>
-                </a:solidFill>
-              </a:defRPr>
-            </a:pPr>
-            <a:r>
-              <a:t>Bilder:</a:t>
-            </a:r>
-          </a:p>
-          <a:p>
-            <a:pPr marL="130342" indent="-130342">
-              <a:buSzPct val="100000"/>
-              <a:buChar char="•"/>
-              <a:defRPr sz="1400"/>
-            </a:pPr>
-            <a:r>
-              <a:rPr>
-                <a:uFill>
-                  <a:solidFill>
-                    <a:srgbClr val="0563C1"/>
-                  </a:solidFill>
-                </a:uFill>
-                <a:hlinkClick r:id="rId2" invalidUrl="" action="" tgtFrame="" tooltip="" history="1" highlightClick="0" endSnd="0"/>
-              </a:rPr>
-              <a:t>https://www.magnific.com/de/vektoren-premium/hypotonie-hypertonie-krankheit-winziger-kardiologe-der-bluthochdruck-mit-tonometer-misst-arzt-beraet-aeltere-patienten-zu-kardiologischen-erkrankungen-aerztliche-untersuchung-kardiologische-untersuchung_18961593.htm</a:t>
-            </a:r>
-          </a:p>
-          <a:p>
-            <a:pPr>
-              <a:defRPr sz="1400"/>
-            </a:pPr>
-          </a:p>
-          <a:p>
-            <a:pPr>
-              <a:defRPr sz="1400"/>
-            </a:pPr>
-          </a:p>
-          <a:p>
-            <a:pPr>
-              <a:defRPr b="1" sz="1400">
-                <a:solidFill>
-                  <a:srgbClr val="212B48"/>
-                </a:solidFill>
-              </a:defRPr>
-            </a:pPr>
-            <a:r>
-              <a:t>Daten:</a:t>
-            </a:r>
-          </a:p>
-          <a:p>
-            <a:pPr marL="130342" indent="-130342">
-              <a:buSzPct val="100000"/>
-              <a:buChar char="•"/>
-              <a:defRPr sz="1400"/>
-            </a:pPr>
-            <a:r>
-              <a:t>https://ourworldindata.org/grapher/hypertension-adults-30-79.csv</a:t>
-            </a:r>
-          </a:p>
-          <a:p>
-            <a:pPr marL="140368" indent="-140368" defTabSz="12700">
-              <a:lnSpc>
-                <a:spcPct val="135000"/>
-              </a:lnSpc>
-              <a:buSzPct val="100000"/>
-              <a:buChar char="•"/>
-              <a:tabLst>
-                <a:tab pos="355600" algn="l"/>
-                <a:tab pos="711200" algn="l"/>
-                <a:tab pos="1066800" algn="l"/>
-                <a:tab pos="1422400" algn="l"/>
-                <a:tab pos="1778000" algn="l"/>
-                <a:tab pos="2133600" algn="l"/>
-                <a:tab pos="2489200" algn="l"/>
-                <a:tab pos="2844800" algn="l"/>
-                <a:tab pos="3200400" algn="l"/>
-                <a:tab pos="3556000" algn="l"/>
-                <a:tab pos="3911600" algn="l"/>
-                <a:tab pos="4267200" algn="l"/>
-              </a:tabLst>
-              <a:defRPr sz="1400"/>
-            </a:pPr>
-            <a:r>
-              <a:rPr>
-                <a:uFill>
-                  <a:solidFill>
-                    <a:srgbClr val="0563C1"/>
-                  </a:solidFill>
-                </a:uFill>
-                <a:hlinkClick r:id="rId3" invalidUrl="" action="" tgtFrame="" tooltip="" history="1" highlightClick="0" endSnd="0"/>
-              </a:rPr>
-              <a:t>https://ourworldindata.org/grapher/women-high-blood-pressure.csv</a:t>
-            </a:r>
-          </a:p>
-          <a:p>
-            <a:pPr marL="140368" indent="-140368" defTabSz="12700">
-              <a:lnSpc>
-                <a:spcPct val="135000"/>
-              </a:lnSpc>
-              <a:buSzPct val="100000"/>
-              <a:buChar char="•"/>
-              <a:tabLst>
-                <a:tab pos="355600" algn="l"/>
-                <a:tab pos="711200" algn="l"/>
-                <a:tab pos="1066800" algn="l"/>
-                <a:tab pos="1422400" algn="l"/>
-                <a:tab pos="1778000" algn="l"/>
-                <a:tab pos="2133600" algn="l"/>
-                <a:tab pos="2489200" algn="l"/>
-                <a:tab pos="2844800" algn="l"/>
-                <a:tab pos="3200400" algn="l"/>
-                <a:tab pos="3556000" algn="l"/>
-                <a:tab pos="3911600" algn="l"/>
-                <a:tab pos="4267200" algn="l"/>
-              </a:tabLst>
-              <a:defRPr sz="1400"/>
-            </a:pPr>
-            <a:r>
-              <a:t>https://ourworldindata.org/grapher/male-high-blood-pressure.csv</a:t>
-            </a:r>
-          </a:p>
-          <a:p>
-            <a:pPr marL="140368" indent="-140368" defTabSz="12700">
-              <a:lnSpc>
-                <a:spcPct val="135000"/>
-              </a:lnSpc>
-              <a:buSzPct val="100000"/>
-              <a:buChar char="•"/>
-              <a:tabLst>
-                <a:tab pos="355600" algn="l"/>
-                <a:tab pos="711200" algn="l"/>
-                <a:tab pos="1066800" algn="l"/>
-                <a:tab pos="1422400" algn="l"/>
-                <a:tab pos="1778000" algn="l"/>
-                <a:tab pos="2133600" algn="l"/>
-                <a:tab pos="2489200" algn="l"/>
-                <a:tab pos="2844800" algn="l"/>
-                <a:tab pos="3200400" algn="l"/>
-                <a:tab pos="3556000" algn="l"/>
-                <a:tab pos="3911600" algn="l"/>
-                <a:tab pos="4267200" algn="l"/>
-              </a:tabLst>
-              <a:defRPr sz="1400"/>
-            </a:pPr>
-            <a:r>
-              <a:t>https://ourworldindata.org/grapher/death-rate-from-hypertensive-heart-disease-who-ghe-age-standardized.csv</a:t>
-            </a:r>
-          </a:p>
-        </p:txBody>
-      </p:sp>
-    </p:spTree>
-  </p:cSld>
-  <p:clrMapOvr>
-    <a:masterClrMapping/>
-  </p:clrMapOvr>
-  <p:transition xmlns:p14="http://schemas.microsoft.com/office/powerpoint/2010/main" spd="med" advClick="1"/>
-</p:sld>
-</file>
-
 <file path=ppt/slides/slide3.xml><?xml version="1.0" encoding="utf-8"?>
-<p:sld xmlns:a="http://schemas.openxmlformats.org/drawingml/2006/main" xmlns:r="http://schemas.openxmlformats.org/officeDocument/2006/relationships" xmlns:p="http://schemas.openxmlformats.org/presentationml/2006/main" xmlns:m="http://schemas.openxmlformats.org/officeDocument/2006/math" xmlns:a14="http://schemas.microsoft.com/office/drawing/2010/main" showMasterSp="1" showMasterPhAnim="1">
-  <p:cSld>
-    <p:spTree>
-      <p:nvGrpSpPr>
-        <p:cNvPr id="1" name=""/>
-        <p:cNvGrpSpPr/>
-        <p:nvPr/>
-      </p:nvGrpSpPr>
-      <p:grpSpPr>
-        <a:xfrm>
-          <a:off x="0" y="0"/>
-          <a:ext cx="0" cy="0"/>
-          <a:chOff x="0" y="0"/>
-          <a:chExt cx="0" cy="0"/>
-        </a:xfrm>
-      </p:grpSpPr>
-      <p:sp>
-        <p:nvSpPr>
-          <p:cNvPr id="52" name="Shape 2"/>
-          <p:cNvSpPr/>
-          <p:nvPr/>
-        </p:nvSpPr>
-        <p:spPr>
-          <a:xfrm>
-            <a:off x="665075" y="1325880"/>
-            <a:ext cx="5079633" cy="4795838"/>
-          </a:xfrm>
-          <a:prstGeom prst="roundRect">
-            <a:avLst>
-              <a:gd name="adj" fmla="val 1610"/>
-            </a:avLst>
-          </a:prstGeom>
-          <a:solidFill>
-            <a:srgbClr val="DFF3FA"/>
-          </a:solidFill>
-          <a:ln w="12700">
-            <a:solidFill>
-              <a:srgbClr val="DFF3FA">
-                <a:alpha val="0"/>
-              </a:srgbClr>
-            </a:solidFill>
-          </a:ln>
-        </p:spPr>
-        <p:txBody>
-          <a:bodyPr lIns="45719" rIns="45719"/>
-          <a:lstStyle/>
-          <a:p>
-            <a:pPr/>
-          </a:p>
-        </p:txBody>
-      </p:sp>
-      <p:sp>
-        <p:nvSpPr>
-          <p:cNvPr id="53" name="Shape 5"/>
-          <p:cNvSpPr/>
-          <p:nvPr/>
-        </p:nvSpPr>
-        <p:spPr>
-          <a:xfrm>
-            <a:off x="6318444" y="1328027"/>
-            <a:ext cx="5084713" cy="4791543"/>
-          </a:xfrm>
-          <a:prstGeom prst="roundRect">
-            <a:avLst>
-              <a:gd name="adj" fmla="val 1798"/>
-            </a:avLst>
-          </a:prstGeom>
-          <a:solidFill>
-            <a:srgbClr val="FFFFFF"/>
-          </a:solidFill>
-          <a:ln w="7620">
-            <a:solidFill>
-              <a:srgbClr val="DDE7F0"/>
-            </a:solidFill>
-          </a:ln>
-        </p:spPr>
-        <p:txBody>
-          <a:bodyPr lIns="45719" rIns="45719"/>
-          <a:lstStyle/>
-          <a:p>
-            <a:pPr/>
-          </a:p>
-        </p:txBody>
-      </p:sp>
-      <p:sp>
-        <p:nvSpPr>
-          <p:cNvPr id="54" name="Text 1"/>
-          <p:cNvSpPr txBox="1"/>
-          <p:nvPr/>
-        </p:nvSpPr>
-        <p:spPr>
-          <a:xfrm>
-            <a:off x="658368" y="566927"/>
-            <a:ext cx="8138160" cy="530353"/>
-          </a:xfrm>
-          <a:prstGeom prst="rect">
-            <a:avLst/>
-          </a:prstGeom>
-          <a:ln w="12700">
-            <a:miter lim="400000"/>
-          </a:ln>
-          <a:extLst>
-            <a:ext uri="{C572A759-6A51-4108-AA02-DFA0A04FC94B}">
-              <ma14:wrappingTextBoxFlag xmlns:ma14="http://schemas.microsoft.com/office/mac/drawingml/2011/main" val="1"/>
-            </a:ext>
-          </a:extLst>
-        </p:spPr>
-        <p:txBody>
-          <a:bodyPr lIns="253" tIns="253" rIns="253" bIns="253" anchor="ctr">
-            <a:normAutofit fontScale="100000" lnSpcReduction="0"/>
-          </a:bodyPr>
-          <a:lstStyle>
-            <a:lvl1pPr>
-              <a:defRPr b="1" sz="2700">
-                <a:solidFill>
-                  <a:srgbClr val="1E2B4A"/>
-                </a:solidFill>
-              </a:defRPr>
-            </a:lvl1pPr>
-          </a:lstStyle>
-          <a:p>
-            <a:pPr/>
-            <a:r>
-              <a:t>Datenquelle &amp; Datensatz</a:t>
-            </a:r>
-          </a:p>
-        </p:txBody>
-      </p:sp>
-      <p:sp>
-        <p:nvSpPr>
-          <p:cNvPr id="55" name="Datenquelle: WHO Global Health Observatory…"/>
-          <p:cNvSpPr txBox="1"/>
-          <p:nvPr/>
-        </p:nvSpPr>
-        <p:spPr>
-          <a:xfrm>
-            <a:off x="775073" y="1401681"/>
-            <a:ext cx="4859637" cy="4281666"/>
-          </a:xfrm>
-          <a:prstGeom prst="rect">
-            <a:avLst/>
-          </a:prstGeom>
-          <a:ln w="12700">
-            <a:miter lim="400000"/>
-          </a:ln>
-          <a:extLst>
-            <a:ext uri="{C572A759-6A51-4108-AA02-DFA0A04FC94B}">
-              <ma14:wrappingTextBoxFlag xmlns:ma14="http://schemas.microsoft.com/office/mac/drawingml/2011/main" val="1"/>
-            </a:ext>
-          </a:extLst>
-        </p:spPr>
-        <p:txBody>
-          <a:bodyPr lIns="45719" rIns="45719">
-            <a:spAutoFit/>
-          </a:bodyPr>
-          <a:lstStyle/>
-          <a:p>
-            <a:pPr defTabSz="12700">
-              <a:lnSpc>
-                <a:spcPct val="135000"/>
-              </a:lnSpc>
-              <a:tabLst>
-                <a:tab pos="355600" algn="l"/>
-                <a:tab pos="711200" algn="l"/>
-                <a:tab pos="1066800" algn="l"/>
-                <a:tab pos="1422400" algn="l"/>
-                <a:tab pos="1778000" algn="l"/>
-                <a:tab pos="2133600" algn="l"/>
-                <a:tab pos="2489200" algn="l"/>
-                <a:tab pos="2844800" algn="l"/>
-                <a:tab pos="3200400" algn="l"/>
-                <a:tab pos="3556000" algn="l"/>
-                <a:tab pos="3911600" algn="l"/>
-                <a:tab pos="4267200" algn="l"/>
-              </a:tabLst>
-              <a:defRPr b="1" sz="1400">
-                <a:solidFill>
-                  <a:srgbClr val="212B48"/>
-                </a:solidFill>
-              </a:defRPr>
-            </a:pPr>
-            <a:r>
-              <a:t>Datenquelle: WHO Global Health Observatory</a:t>
-            </a:r>
-          </a:p>
-          <a:p>
-            <a:pPr lvl="1" marL="521368" indent="-140368" defTabSz="12700">
-              <a:lnSpc>
-                <a:spcPct val="135000"/>
-              </a:lnSpc>
-              <a:buSzPct val="100000"/>
-              <a:buChar char="•"/>
-              <a:defRPr sz="1200"/>
-            </a:pPr>
-            <a:r>
-              <a:t>internationale Gesundheitsdatenbank der World Health Organization</a:t>
-            </a:r>
-          </a:p>
-          <a:p>
-            <a:pPr lvl="1" marL="521368" indent="-140368" defTabSz="12700">
-              <a:lnSpc>
-                <a:spcPct val="135000"/>
-              </a:lnSpc>
-              <a:buSzPct val="100000"/>
-              <a:buChar char="•"/>
-              <a:defRPr sz="1200"/>
-            </a:pPr>
-            <a:r>
-              <a:t>enthält vergleichbare Gesundheitsindikatoren nach Ländern, Jahren und Bevölkerungsgruppen</a:t>
-            </a:r>
-          </a:p>
-          <a:p>
-            <a:pPr lvl="1" marL="521368" indent="-140368" defTabSz="12700">
-              <a:lnSpc>
-                <a:spcPct val="135000"/>
-              </a:lnSpc>
-              <a:buSzPct val="100000"/>
-              <a:buChar char="•"/>
-              <a:defRPr sz="1200"/>
-            </a:pPr>
-            <a:r>
-              <a:t>geeignet für Public-Health-Analysen und zeitliche Trendvergleiche</a:t>
-            </a:r>
-          </a:p>
-          <a:p>
-            <a:pPr defTabSz="12700">
-              <a:lnSpc>
-                <a:spcPct val="135000"/>
-              </a:lnSpc>
-              <a:defRPr sz="1400"/>
-            </a:pPr>
-          </a:p>
-          <a:p>
-            <a:pPr defTabSz="12700">
-              <a:lnSpc>
-                <a:spcPct val="135000"/>
-              </a:lnSpc>
-              <a:tabLst>
-                <a:tab pos="355600" algn="l"/>
-                <a:tab pos="711200" algn="l"/>
-                <a:tab pos="1066800" algn="l"/>
-                <a:tab pos="1422400" algn="l"/>
-                <a:tab pos="1778000" algn="l"/>
-                <a:tab pos="2133600" algn="l"/>
-                <a:tab pos="2489200" algn="l"/>
-                <a:tab pos="2844800" algn="l"/>
-                <a:tab pos="3200400" algn="l"/>
-                <a:tab pos="3556000" algn="l"/>
-                <a:tab pos="3911600" algn="l"/>
-                <a:tab pos="4267200" algn="l"/>
-              </a:tabLst>
-              <a:defRPr b="1" sz="1400">
-                <a:solidFill>
-                  <a:srgbClr val="212B48"/>
-                </a:solidFill>
-              </a:defRPr>
-            </a:pPr>
-            <a:r>
-              <a:t>Verwendete Daten für den Analyse-Teil</a:t>
-            </a:r>
-          </a:p>
-          <a:p>
-            <a:pPr lvl="1" marL="521368" indent="-140368" defTabSz="12700">
-              <a:lnSpc>
-                <a:spcPct val="135000"/>
-              </a:lnSpc>
-              <a:buSzPct val="100000"/>
-              <a:buChar char="•"/>
-              <a:defRPr sz="1200"/>
-            </a:pPr>
-            <a:r>
-              <a:rPr b="1">
-                <a:solidFill>
-                  <a:srgbClr val="212B48"/>
-                </a:solidFill>
-              </a:rPr>
-              <a:t>Land:</a:t>
-            </a:r>
-            <a:r>
-              <a:t> Deutschland</a:t>
-            </a:r>
-          </a:p>
-          <a:p>
-            <a:pPr lvl="1" marL="521368" indent="-140368" defTabSz="12700">
-              <a:lnSpc>
-                <a:spcPct val="135000"/>
-              </a:lnSpc>
-              <a:buSzPct val="100000"/>
-              <a:buChar char="•"/>
-              <a:defRPr b="1" sz="1200"/>
-            </a:pPr>
-            <a:r>
-              <a:rPr>
-                <a:solidFill>
-                  <a:srgbClr val="212B48"/>
-                </a:solidFill>
-              </a:rPr>
-              <a:t>Zeitraum:</a:t>
-            </a:r>
-            <a:r>
-              <a:rPr b="0"/>
-              <a:t> 2000–2019</a:t>
-            </a:r>
-            <a:endParaRPr b="0"/>
-          </a:p>
-          <a:p>
-            <a:pPr lvl="1" marL="521368" indent="-140368" defTabSz="12700">
-              <a:lnSpc>
-                <a:spcPct val="135000"/>
-              </a:lnSpc>
-              <a:buSzPct val="100000"/>
-              <a:buChar char="•"/>
-              <a:defRPr b="1" sz="1200">
-                <a:solidFill>
-                  <a:srgbClr val="212B48"/>
-                </a:solidFill>
-              </a:defRPr>
-            </a:pPr>
-            <a:r>
-              <a:t>Indikatoren:</a:t>
-            </a:r>
-            <a:endParaRPr b="0"/>
-          </a:p>
-          <a:p>
-            <a:pPr lvl="2" marL="902368" indent="-140368" defTabSz="12700">
-              <a:lnSpc>
-                <a:spcPct val="135000"/>
-              </a:lnSpc>
-              <a:buSzPct val="100000"/>
-              <a:buChar char="•"/>
-              <a:defRPr sz="1200"/>
-            </a:pPr>
-            <a:r>
-              <a:t>Hypertonie-Prävalenz</a:t>
-            </a:r>
-          </a:p>
-          <a:p>
-            <a:pPr lvl="2" marL="902368" indent="-140368" defTabSz="12700">
-              <a:lnSpc>
-                <a:spcPct val="135000"/>
-              </a:lnSpc>
-              <a:buSzPct val="100000"/>
-              <a:buChar char="•"/>
-              <a:defRPr sz="1200"/>
-            </a:pPr>
-            <a:r>
-              <a:t>Mortalitätsrate durch hypertensive Herzkrankheit</a:t>
-            </a:r>
-          </a:p>
-          <a:p>
-            <a:pPr lvl="2" marL="902368" indent="-140368" defTabSz="12700">
-              <a:lnSpc>
-                <a:spcPct val="135000"/>
-              </a:lnSpc>
-              <a:buSzPct val="100000"/>
-              <a:buChar char="•"/>
-              <a:defRPr sz="1200"/>
-            </a:pPr>
-            <a:r>
-              <a:t>geschlechtsspezifische Prävalenzwerte für Männer und Frauen</a:t>
-            </a:r>
-          </a:p>
-          <a:p>
-            <a:pPr lvl="1" marL="521368" indent="-140368" defTabSz="12700">
-              <a:lnSpc>
-                <a:spcPct val="135000"/>
-              </a:lnSpc>
-              <a:buSzPct val="100000"/>
-              <a:buChar char="•"/>
-              <a:defRPr sz="1200"/>
-            </a:pPr>
-            <a:r>
-              <a:rPr b="1">
-                <a:solidFill>
-                  <a:srgbClr val="212B48"/>
-                </a:solidFill>
-              </a:rPr>
-              <a:t>Datenebene:</a:t>
-            </a:r>
-            <a:r>
-              <a:t> aggregierte Länder- und Jahresdaten</a:t>
-            </a:r>
-          </a:p>
-        </p:txBody>
-      </p:sp>
-      <p:sp>
-        <p:nvSpPr>
-          <p:cNvPr id="56" name="Datenquelle: National Health and Nutrition Examination Survey…"/>
-          <p:cNvSpPr txBox="1"/>
-          <p:nvPr/>
-        </p:nvSpPr>
-        <p:spPr>
-          <a:xfrm>
-            <a:off x="6474180" y="1401681"/>
-            <a:ext cx="4542812" cy="4644235"/>
-          </a:xfrm>
-          <a:prstGeom prst="rect">
-            <a:avLst/>
-          </a:prstGeom>
-          <a:ln w="12700">
-            <a:miter lim="400000"/>
-          </a:ln>
-          <a:extLst>
-            <a:ext uri="{C572A759-6A51-4108-AA02-DFA0A04FC94B}">
-              <ma14:wrappingTextBoxFlag xmlns:ma14="http://schemas.microsoft.com/office/mac/drawingml/2011/main" val="1"/>
-            </a:ext>
-          </a:extLst>
-        </p:spPr>
-        <p:txBody>
-          <a:bodyPr lIns="45719" rIns="45719">
-            <a:spAutoFit/>
-          </a:bodyPr>
-          <a:lstStyle/>
-          <a:p>
-            <a:pPr defTabSz="12700">
-              <a:lnSpc>
-                <a:spcPct val="135000"/>
-              </a:lnSpc>
-              <a:tabLst>
-                <a:tab pos="355600" algn="l"/>
-                <a:tab pos="711200" algn="l"/>
-                <a:tab pos="1066800" algn="l"/>
-                <a:tab pos="1422400" algn="l"/>
-                <a:tab pos="1778000" algn="l"/>
-                <a:tab pos="2133600" algn="l"/>
-                <a:tab pos="2489200" algn="l"/>
-                <a:tab pos="2844800" algn="l"/>
-                <a:tab pos="3200400" algn="l"/>
-                <a:tab pos="3556000" algn="l"/>
-                <a:tab pos="3911600" algn="l"/>
-                <a:tab pos="4267200" algn="l"/>
-              </a:tabLst>
-              <a:defRPr b="1" sz="1400">
-                <a:solidFill>
-                  <a:srgbClr val="212B48"/>
-                </a:solidFill>
-              </a:defRPr>
-            </a:pPr>
-            <a:r>
-              <a:t>Datenquelle: National Health and Nutrition Examination Survey</a:t>
-            </a:r>
-          </a:p>
-          <a:p>
-            <a:pPr lvl="1" marL="521368" indent="-140368" defTabSz="12700">
-              <a:lnSpc>
-                <a:spcPct val="135000"/>
-              </a:lnSpc>
-              <a:buSzPct val="100000"/>
-              <a:buChar char="•"/>
-              <a:defRPr sz="1200"/>
-            </a:pPr>
-            <a:r>
-              <a:t>US-amerikanische Gesundheitsstudie</a:t>
-            </a:r>
-          </a:p>
-          <a:p>
-            <a:pPr lvl="1" marL="521368" indent="-140368" defTabSz="12700">
-              <a:lnSpc>
-                <a:spcPct val="135000"/>
-              </a:lnSpc>
-              <a:buSzPct val="100000"/>
-              <a:buChar char="•"/>
-              <a:defRPr sz="1200"/>
-            </a:pPr>
-            <a:r>
-              <a:t>enthält Interviewdaten, Untersuchungsdaten und körperbezogene Messwerte von Teilnehmenden</a:t>
-            </a:r>
-          </a:p>
-          <a:p>
-            <a:pPr lvl="1" marL="521368" indent="-140368" defTabSz="12700">
-              <a:lnSpc>
-                <a:spcPct val="135000"/>
-              </a:lnSpc>
-              <a:buSzPct val="100000"/>
-              <a:buChar char="•"/>
-              <a:defRPr sz="1200"/>
-            </a:pPr>
-            <a:r>
-              <a:t>geeignet für Analysen auf Personenebene und Machine-Learning-Modelle</a:t>
-            </a:r>
-          </a:p>
-          <a:p>
-            <a:pPr defTabSz="12700">
-              <a:lnSpc>
-                <a:spcPct val="135000"/>
-              </a:lnSpc>
-              <a:defRPr sz="1400"/>
-            </a:pPr>
-          </a:p>
-          <a:p>
-            <a:pPr defTabSz="12700">
-              <a:lnSpc>
-                <a:spcPct val="135000"/>
-              </a:lnSpc>
-              <a:tabLst>
-                <a:tab pos="355600" algn="l"/>
-                <a:tab pos="711200" algn="l"/>
-                <a:tab pos="1066800" algn="l"/>
-                <a:tab pos="1422400" algn="l"/>
-                <a:tab pos="1778000" algn="l"/>
-                <a:tab pos="2133600" algn="l"/>
-                <a:tab pos="2489200" algn="l"/>
-                <a:tab pos="2844800" algn="l"/>
-                <a:tab pos="3200400" algn="l"/>
-                <a:tab pos="3556000" algn="l"/>
-                <a:tab pos="3911600" algn="l"/>
-                <a:tab pos="4267200" algn="l"/>
-              </a:tabLst>
-              <a:defRPr b="1" sz="1400">
-                <a:solidFill>
-                  <a:srgbClr val="212B48"/>
-                </a:solidFill>
-              </a:defRPr>
-            </a:pPr>
-            <a:r>
-              <a:t>Verwendete Daten für den Analyse-Teil</a:t>
-            </a:r>
-          </a:p>
-          <a:p>
-            <a:pPr lvl="1" marL="521368" indent="-140368" defTabSz="12700">
-              <a:lnSpc>
-                <a:spcPct val="135000"/>
-              </a:lnSpc>
-              <a:buSzPct val="100000"/>
-              <a:buChar char="•"/>
-              <a:defRPr sz="1200"/>
-            </a:pPr>
-            <a:r>
-              <a:rPr b="1">
-                <a:solidFill>
-                  <a:srgbClr val="212B48"/>
-                </a:solidFill>
-              </a:rPr>
-              <a:t>Land:</a:t>
-            </a:r>
-            <a:r>
-              <a:rPr>
-                <a:solidFill>
-                  <a:srgbClr val="212B48"/>
-                </a:solidFill>
-              </a:rPr>
-              <a:t> </a:t>
-            </a:r>
-            <a:r>
-              <a:t>USA</a:t>
-            </a:r>
-          </a:p>
-          <a:p>
-            <a:pPr lvl="1" marL="521368" indent="-140368" defTabSz="12700">
-              <a:lnSpc>
-                <a:spcPct val="135000"/>
-              </a:lnSpc>
-              <a:buSzPct val="100000"/>
-              <a:buChar char="•"/>
-              <a:defRPr b="1" sz="1200"/>
-            </a:pPr>
-            <a:r>
-              <a:rPr>
-                <a:solidFill>
-                  <a:srgbClr val="212B48"/>
-                </a:solidFill>
-              </a:rPr>
-              <a:t>Zeitraum: </a:t>
-            </a:r>
-            <a:r>
-              <a:rPr b="0"/>
-              <a:t>NHANES-Zyklus August 2021–August 2023</a:t>
-            </a:r>
-            <a:endParaRPr b="0"/>
-          </a:p>
-          <a:p>
-            <a:pPr lvl="1" marL="521368" indent="-140368" defTabSz="12700">
-              <a:lnSpc>
-                <a:spcPct val="135000"/>
-              </a:lnSpc>
-              <a:buSzPct val="100000"/>
-              <a:buChar char="•"/>
-              <a:defRPr b="1" sz="1200">
-                <a:solidFill>
-                  <a:srgbClr val="212B48"/>
-                </a:solidFill>
-              </a:defRPr>
-            </a:pPr>
-            <a:r>
-              <a:t>Indikatoren:</a:t>
-            </a:r>
-            <a:endParaRPr b="0"/>
-          </a:p>
-          <a:p>
-            <a:pPr lvl="2" marL="902368" indent="-140368" defTabSz="12700">
-              <a:lnSpc>
-                <a:spcPct val="135000"/>
-              </a:lnSpc>
-              <a:buSzPct val="100000"/>
-              <a:buChar char="•"/>
-              <a:defRPr sz="1200"/>
-            </a:pPr>
-            <a:r>
-              <a:rPr b="1">
-                <a:solidFill>
-                  <a:srgbClr val="212B48"/>
-                </a:solidFill>
-              </a:rPr>
-              <a:t>BPQ_L:</a:t>
-            </a:r>
-            <a:r>
-              <a:t> Hypertonie-Status</a:t>
-            </a:r>
-          </a:p>
-          <a:p>
-            <a:pPr lvl="2" marL="902368" indent="-140368" defTabSz="12700">
-              <a:lnSpc>
-                <a:spcPct val="135000"/>
-              </a:lnSpc>
-              <a:buSzPct val="100000"/>
-              <a:buChar char="•"/>
-              <a:defRPr sz="1200"/>
-            </a:pPr>
-            <a:r>
-              <a:rPr b="1">
-                <a:solidFill>
-                  <a:srgbClr val="212B48"/>
-                </a:solidFill>
-              </a:rPr>
-              <a:t>DEMO_L:</a:t>
-            </a:r>
-            <a:r>
-              <a:t> Alter und Geschlecht</a:t>
-            </a:r>
-          </a:p>
-          <a:p>
-            <a:pPr lvl="2" marL="902368" indent="-140368" defTabSz="12700">
-              <a:lnSpc>
-                <a:spcPct val="135000"/>
-              </a:lnSpc>
-              <a:buSzPct val="100000"/>
-              <a:buChar char="•"/>
-              <a:defRPr sz="1200"/>
-            </a:pPr>
-            <a:r>
-              <a:rPr b="1">
-                <a:solidFill>
-                  <a:srgbClr val="212B48"/>
-                </a:solidFill>
-              </a:rPr>
-              <a:t>BMX_L:</a:t>
-            </a:r>
-            <a:r>
-              <a:t> Gewicht, Größe, BMI und Taillenumfang</a:t>
-            </a:r>
-          </a:p>
-          <a:p>
-            <a:pPr lvl="1" marL="521368" indent="-140368" defTabSz="12700">
-              <a:lnSpc>
-                <a:spcPct val="135000"/>
-              </a:lnSpc>
-              <a:buSzPct val="100000"/>
-              <a:buChar char="•"/>
-              <a:defRPr sz="1200"/>
-            </a:pPr>
-            <a:r>
-              <a:rPr b="1">
-                <a:solidFill>
-                  <a:srgbClr val="212B48"/>
-                </a:solidFill>
-              </a:rPr>
-              <a:t>Zielvariable:</a:t>
-            </a:r>
-            <a:r>
-              <a:t> Hypertonie ja/nein</a:t>
-            </a:r>
-          </a:p>
-          <a:p>
-            <a:pPr lvl="1" marL="521368" indent="-140368" defTabSz="12700">
-              <a:lnSpc>
-                <a:spcPct val="135000"/>
-              </a:lnSpc>
-              <a:buSzPct val="100000"/>
-              <a:buChar char="•"/>
-              <a:defRPr sz="1200"/>
-            </a:pPr>
-            <a:r>
-              <a:rPr b="1">
-                <a:solidFill>
-                  <a:srgbClr val="212B48"/>
-                </a:solidFill>
-              </a:rPr>
-              <a:t>Datenebene:</a:t>
-            </a:r>
-            <a:r>
-              <a:t> individuelle Teilnehmendendaten, keine aggregierten Ländertrends</a:t>
-            </a:r>
-          </a:p>
-        </p:txBody>
-      </p:sp>
-      <p:sp>
-        <p:nvSpPr>
-          <p:cNvPr id="57" name="Foliennummer"/>
-          <p:cNvSpPr txBox="1"/>
-          <p:nvPr>
-            <p:ph type="sldNum" sz="quarter" idx="4294967295"/>
-          </p:nvPr>
-        </p:nvSpPr>
-        <p:spPr>
-          <a:xfrm>
-            <a:off x="11567159" y="6473952"/>
-            <a:ext cx="153570" cy="190551"/>
-          </a:xfrm>
-          <a:prstGeom prst="rect">
-            <a:avLst/>
-          </a:prstGeom>
-          <a:extLst>
-            <a:ext uri="{C572A759-6A51-4108-AA02-DFA0A04FC94B}">
-              <ma14:wrappingTextBoxFlag xmlns:ma14="http://schemas.microsoft.com/office/mac/drawingml/2011/main" val="1"/>
-            </a:ext>
-          </a:extLst>
-        </p:spPr>
-        <p:txBody>
-          <a:bodyPr/>
-          <a:lstStyle/>
-          <a:p>
-            <a:pPr/>
-            <a:fld id="{86CB4B4D-7CA3-9044-876B-883B54F8677D}" type="slidenum"/>
-          </a:p>
-        </p:txBody>
-      </p:sp>
-    </p:spTree>
-  </p:cSld>
-  <p:clrMapOvr>
-    <a:masterClrMapping/>
-  </p:clrMapOvr>
-  <p:transition xmlns:p14="http://schemas.microsoft.com/office/powerpoint/2010/main" spd="med" advClick="1"/>
-</p:sld>
-</file>
-
-<file path=ppt/slides/slide4.xml><?xml version="1.0" encoding="utf-8"?>
 <p:sld xmlns:a="http://schemas.openxmlformats.org/drawingml/2006/main" xmlns:r="http://schemas.openxmlformats.org/officeDocument/2006/relationships" xmlns:p="http://schemas.openxmlformats.org/presentationml/2006/main" xmlns:m="http://schemas.openxmlformats.org/officeDocument/2006/math" xmlns:a14="http://schemas.microsoft.com/office/drawing/2010/main" showMasterSp="1" showMasterPhAnim="1">
   <p:cSld>
     <p:bg>
@@ -13325,7 +12414,7 @@
       </p:grpSpPr>
       <p:sp>
         <p:nvSpPr>
-          <p:cNvPr id="59" name="Rectangle 2"/>
+          <p:cNvPr id="52" name="Rectangle 2"/>
           <p:cNvSpPr/>
           <p:nvPr/>
         </p:nvSpPr>
@@ -13371,7 +12460,7 @@
       </p:sp>
       <p:sp>
         <p:nvSpPr>
-          <p:cNvPr id="60" name="Rectangle 19"/>
+          <p:cNvPr id="53" name="Rectangle 19"/>
           <p:cNvSpPr/>
           <p:nvPr/>
         </p:nvSpPr>
@@ -13417,7 +12506,7 @@
       </p:sp>
       <p:grpSp>
         <p:nvGrpSpPr>
-          <p:cNvPr id="75" name="Gruppieren"/>
+          <p:cNvPr id="68" name="Gruppieren"/>
           <p:cNvGrpSpPr/>
           <p:nvPr/>
         </p:nvGrpSpPr>
@@ -13431,7 +12520,7 @@
         </p:grpSpPr>
         <p:sp>
           <p:nvSpPr>
-            <p:cNvPr id="61" name="Oval 4"/>
+            <p:cNvPr id="54" name="Oval 4"/>
             <p:cNvSpPr/>
             <p:nvPr/>
           </p:nvSpPr>
@@ -13480,7 +12569,7 @@
         </p:sp>
         <p:sp>
           <p:nvSpPr>
-            <p:cNvPr id="62" name="Oval 5"/>
+            <p:cNvPr id="55" name="Oval 5"/>
             <p:cNvSpPr/>
             <p:nvPr/>
           </p:nvSpPr>
@@ -13529,7 +12618,7 @@
         </p:sp>
         <p:sp>
           <p:nvSpPr>
-            <p:cNvPr id="63" name="Oval 6"/>
+            <p:cNvPr id="56" name="Oval 6"/>
             <p:cNvSpPr/>
             <p:nvPr/>
           </p:nvSpPr>
@@ -13578,7 +12667,7 @@
         </p:sp>
         <p:sp>
           <p:nvSpPr>
-            <p:cNvPr id="64" name="Oval 7"/>
+            <p:cNvPr id="57" name="Oval 7"/>
             <p:cNvSpPr/>
             <p:nvPr/>
           </p:nvSpPr>
@@ -13627,7 +12716,7 @@
         </p:sp>
         <p:sp>
           <p:nvSpPr>
-            <p:cNvPr id="65" name="Oval 8"/>
+            <p:cNvPr id="58" name="Oval 8"/>
             <p:cNvSpPr/>
             <p:nvPr/>
           </p:nvSpPr>
@@ -13676,7 +12765,7 @@
         </p:sp>
         <p:sp>
           <p:nvSpPr>
-            <p:cNvPr id="66" name="Oval 9"/>
+            <p:cNvPr id="59" name="Oval 9"/>
             <p:cNvSpPr/>
             <p:nvPr/>
           </p:nvSpPr>
@@ -13725,7 +12814,7 @@
         </p:sp>
         <p:sp>
           <p:nvSpPr>
-            <p:cNvPr id="67" name="Oval 10"/>
+            <p:cNvPr id="60" name="Oval 10"/>
             <p:cNvSpPr/>
             <p:nvPr/>
           </p:nvSpPr>
@@ -13774,7 +12863,7 @@
         </p:sp>
         <p:sp>
           <p:nvSpPr>
-            <p:cNvPr id="68" name="Rectangle 11"/>
+            <p:cNvPr id="61" name="Rectangle 11"/>
             <p:cNvSpPr/>
             <p:nvPr/>
           </p:nvSpPr>
@@ -13823,7 +12912,7 @@
         </p:sp>
         <p:sp>
           <p:nvSpPr>
-            <p:cNvPr id="69" name="Rectangle 12"/>
+            <p:cNvPr id="62" name="Rectangle 12"/>
             <p:cNvSpPr/>
             <p:nvPr/>
           </p:nvSpPr>
@@ -13872,7 +12961,7 @@
         </p:sp>
         <p:sp>
           <p:nvSpPr>
-            <p:cNvPr id="70" name="Rectangle 13"/>
+            <p:cNvPr id="63" name="Rectangle 13"/>
             <p:cNvSpPr/>
             <p:nvPr/>
           </p:nvSpPr>
@@ -13921,7 +13010,7 @@
         </p:sp>
         <p:sp>
           <p:nvSpPr>
-            <p:cNvPr id="71" name="Rectangle 14"/>
+            <p:cNvPr id="64" name="Rectangle 14"/>
             <p:cNvSpPr/>
             <p:nvPr/>
           </p:nvSpPr>
@@ -13970,7 +13059,7 @@
         </p:sp>
         <p:sp>
           <p:nvSpPr>
-            <p:cNvPr id="72" name="Rectangle 15"/>
+            <p:cNvPr id="65" name="Rectangle 15"/>
             <p:cNvSpPr/>
             <p:nvPr/>
           </p:nvSpPr>
@@ -14019,7 +13108,7 @@
         </p:sp>
         <p:sp>
           <p:nvSpPr>
-            <p:cNvPr id="73" name="Rectangle 16"/>
+            <p:cNvPr id="66" name="Rectangle 16"/>
             <p:cNvSpPr/>
             <p:nvPr/>
           </p:nvSpPr>
@@ -14068,7 +13157,7 @@
         </p:sp>
         <p:sp>
           <p:nvSpPr>
-            <p:cNvPr id="74" name="Rectangle 15"/>
+            <p:cNvPr id="67" name="Rectangle 15"/>
             <p:cNvSpPr/>
             <p:nvPr/>
           </p:nvSpPr>
@@ -14118,7 +13207,7 @@
       </p:grpSp>
       <p:sp>
         <p:nvSpPr>
-          <p:cNvPr id="76" name="Text 5"/>
+          <p:cNvPr id="69" name="Text 5"/>
           <p:cNvSpPr txBox="1"/>
           <p:nvPr/>
         </p:nvSpPr>
@@ -14162,7 +13251,7 @@
       </p:sp>
       <p:sp>
         <p:nvSpPr>
-          <p:cNvPr id="77" name="Text 6"/>
+          <p:cNvPr id="70" name="Text 6"/>
           <p:cNvSpPr txBox="1"/>
           <p:nvPr/>
         </p:nvSpPr>
@@ -14206,7 +13295,7 @@
       </p:sp>
       <p:sp>
         <p:nvSpPr>
-          <p:cNvPr id="78" name="Text 8"/>
+          <p:cNvPr id="71" name="Text 8"/>
           <p:cNvSpPr txBox="1"/>
           <p:nvPr/>
         </p:nvSpPr>
@@ -14250,7 +13339,7 @@
       </p:sp>
       <p:sp>
         <p:nvSpPr>
-          <p:cNvPr id="79" name="Text 15"/>
+          <p:cNvPr id="72" name="Text 15"/>
           <p:cNvSpPr txBox="1"/>
           <p:nvPr/>
         </p:nvSpPr>
@@ -14301,7 +13390,7 @@
 </p:sld>
 </file>
 
-<file path=ppt/slides/slide5.xml><?xml version="1.0" encoding="utf-8"?>
+<file path=ppt/slides/slide4.xml><?xml version="1.0" encoding="utf-8"?>
 <p:sld xmlns:a="http://schemas.openxmlformats.org/drawingml/2006/main" xmlns:r="http://schemas.openxmlformats.org/officeDocument/2006/relationships" xmlns:p="http://schemas.openxmlformats.org/presentationml/2006/main" xmlns:m="http://schemas.openxmlformats.org/officeDocument/2006/math" xmlns:a14="http://schemas.microsoft.com/office/drawing/2010/main" showMasterSp="1" showMasterPhAnim="1">
   <p:cSld>
     <p:spTree>
@@ -14320,7 +13409,7 @@
       </p:grpSpPr>
       <p:sp>
         <p:nvSpPr>
-          <p:cNvPr id="81" name="Text 1"/>
+          <p:cNvPr id="74" name="Text 1"/>
           <p:cNvSpPr txBox="1"/>
           <p:nvPr/>
         </p:nvSpPr>
@@ -14364,7 +13453,7 @@
       </p:sp>
       <p:sp>
         <p:nvSpPr>
-          <p:cNvPr id="82" name="Datenquelle: WHO Global Health Observatory…"/>
+          <p:cNvPr id="75" name="Datenquelle: WHO Global Health Observatory…"/>
           <p:cNvSpPr txBox="1"/>
           <p:nvPr/>
         </p:nvSpPr>
@@ -14629,7 +13718,7 @@
       </p:sp>
       <p:sp>
         <p:nvSpPr>
-          <p:cNvPr id="83" name="Foliennummer"/>
+          <p:cNvPr id="76" name="Foliennummer"/>
           <p:cNvSpPr txBox="1"/>
           <p:nvPr>
             <p:ph type="sldNum" sz="quarter" idx="4294967295"/>
@@ -14667,7 +13756,7 @@
 </p:sld>
 </file>
 
-<file path=ppt/slides/slide6.xml><?xml version="1.0" encoding="utf-8"?>
+<file path=ppt/slides/slide5.xml><?xml version="1.0" encoding="utf-8"?>
 <p:sld xmlns:a="http://schemas.openxmlformats.org/drawingml/2006/main" xmlns:r="http://schemas.openxmlformats.org/officeDocument/2006/relationships" xmlns:p="http://schemas.openxmlformats.org/presentationml/2006/main" xmlns:m="http://schemas.openxmlformats.org/officeDocument/2006/math" xmlns:a14="http://schemas.microsoft.com/office/drawing/2010/main" showMasterSp="1" showMasterPhAnim="1">
   <p:cSld>
     <p:spTree>
@@ -14686,7 +13775,7 @@
       </p:grpSpPr>
       <p:sp>
         <p:nvSpPr>
-          <p:cNvPr id="85" name="Text 1"/>
+          <p:cNvPr id="78" name="Text 1"/>
           <p:cNvSpPr txBox="1"/>
           <p:nvPr/>
         </p:nvSpPr>
@@ -14730,7 +13819,7 @@
       </p:sp>
       <p:sp>
         <p:nvSpPr>
-          <p:cNvPr id="86" name="Shape 12"/>
+          <p:cNvPr id="79" name="Shape 12"/>
           <p:cNvSpPr/>
           <p:nvPr/>
         </p:nvSpPr>
@@ -14765,7 +13854,7 @@
       </p:sp>
       <p:sp>
         <p:nvSpPr>
-          <p:cNvPr id="87" name="Text 13"/>
+          <p:cNvPr id="80" name="Text 13"/>
           <p:cNvSpPr txBox="1"/>
           <p:nvPr/>
         </p:nvSpPr>
@@ -14809,7 +13898,7 @@
       </p:sp>
       <p:sp>
         <p:nvSpPr>
-          <p:cNvPr id="88" name="Text 14"/>
+          <p:cNvPr id="81" name="Text 14"/>
           <p:cNvSpPr txBox="1"/>
           <p:nvPr/>
         </p:nvSpPr>
@@ -14895,7 +13984,7 @@
       </p:sp>
       <p:sp>
         <p:nvSpPr>
-          <p:cNvPr id="89" name="Slide Number Placeholder 0"/>
+          <p:cNvPr id="82" name="Slide Number Placeholder 0"/>
           <p:cNvSpPr txBox="1"/>
           <p:nvPr>
             <p:ph type="sldNum" sz="quarter" idx="4294967295"/>
@@ -14926,7 +14015,7 @@
       </p:sp>
       <p:sp>
         <p:nvSpPr>
-          <p:cNvPr id="90" name="Shape 12"/>
+          <p:cNvPr id="83" name="Shape 12"/>
           <p:cNvSpPr/>
           <p:nvPr/>
         </p:nvSpPr>
@@ -14961,7 +14050,7 @@
       </p:sp>
       <p:sp>
         <p:nvSpPr>
-          <p:cNvPr id="91" name="Text 13"/>
+          <p:cNvPr id="84" name="Text 13"/>
           <p:cNvSpPr txBox="1"/>
           <p:nvPr/>
         </p:nvSpPr>
@@ -15005,7 +14094,7 @@
       </p:sp>
       <p:sp>
         <p:nvSpPr>
-          <p:cNvPr id="92" name="Text 14"/>
+          <p:cNvPr id="85" name="Text 14"/>
           <p:cNvSpPr txBox="1"/>
           <p:nvPr/>
         </p:nvSpPr>
@@ -15084,7 +14173,7 @@
 </p:sld>
 </file>
 
-<file path=ppt/slides/slide7.xml><?xml version="1.0" encoding="utf-8"?>
+<file path=ppt/slides/slide6.xml><?xml version="1.0" encoding="utf-8"?>
 <p:sld xmlns:a="http://schemas.openxmlformats.org/drawingml/2006/main" xmlns:r="http://schemas.openxmlformats.org/officeDocument/2006/relationships" xmlns:p="http://schemas.openxmlformats.org/presentationml/2006/main" xmlns:m="http://schemas.openxmlformats.org/officeDocument/2006/math" xmlns:a14="http://schemas.microsoft.com/office/drawing/2010/main" showMasterSp="1" showMasterPhAnim="1">
   <p:cSld>
     <p:spTree>
@@ -15103,7 +14192,7 @@
       </p:grpSpPr>
       <p:sp>
         <p:nvSpPr>
-          <p:cNvPr id="96" name="Text 1"/>
+          <p:cNvPr id="89" name="Text 1"/>
           <p:cNvSpPr txBox="1"/>
           <p:nvPr/>
         </p:nvSpPr>
@@ -15147,7 +14236,7 @@
       </p:sp>
       <p:sp>
         <p:nvSpPr>
-          <p:cNvPr id="97" name="Slide Number Placeholder 0"/>
+          <p:cNvPr id="90" name="Slide Number Placeholder 0"/>
           <p:cNvSpPr txBox="1"/>
           <p:nvPr>
             <p:ph type="sldNum" sz="quarter" idx="4294967295"/>
@@ -15178,7 +14267,7 @@
       </p:sp>
       <p:grpSp>
         <p:nvGrpSpPr>
-          <p:cNvPr id="104" name="Gruppieren"/>
+          <p:cNvPr id="97" name="Gruppieren"/>
           <p:cNvGrpSpPr/>
           <p:nvPr/>
         </p:nvGrpSpPr>
@@ -15192,7 +14281,7 @@
         </p:grpSpPr>
         <p:sp>
           <p:nvSpPr>
-            <p:cNvPr id="98" name="Shape 12"/>
+            <p:cNvPr id="91" name="Shape 12"/>
             <p:cNvSpPr/>
             <p:nvPr/>
           </p:nvSpPr>
@@ -15232,7 +14321,7 @@
         </p:sp>
         <p:sp>
           <p:nvSpPr>
-            <p:cNvPr id="99" name="Shape 15"/>
+            <p:cNvPr id="92" name="Shape 15"/>
             <p:cNvSpPr/>
             <p:nvPr/>
           </p:nvSpPr>
@@ -15272,7 +14361,7 @@
         </p:sp>
         <p:sp>
           <p:nvSpPr>
-            <p:cNvPr id="100" name="Shape 12"/>
+            <p:cNvPr id="93" name="Shape 12"/>
             <p:cNvSpPr/>
             <p:nvPr/>
           </p:nvSpPr>
@@ -15312,7 +14401,7 @@
         </p:sp>
         <p:sp>
           <p:nvSpPr>
-            <p:cNvPr id="101" name="1. Prävalenz…"/>
+            <p:cNvPr id="94" name="1. Prävalenz…"/>
             <p:cNvSpPr txBox="1"/>
             <p:nvPr/>
           </p:nvSpPr>
@@ -15378,7 +14467,7 @@
         </p:sp>
         <p:sp>
           <p:nvSpPr>
-            <p:cNvPr id="102" name="2. Mortalität…"/>
+            <p:cNvPr id="95" name="2. Mortalität…"/>
             <p:cNvSpPr txBox="1"/>
             <p:nvPr/>
           </p:nvSpPr>
@@ -15444,7 +14533,7 @@
         </p:sp>
         <p:sp>
           <p:nvSpPr>
-            <p:cNvPr id="103" name="3. Geschlecht…"/>
+            <p:cNvPr id="96" name="3. Geschlecht…"/>
             <p:cNvSpPr txBox="1"/>
             <p:nvPr/>
           </p:nvSpPr>
@@ -15518,7 +14607,7 @@
 </p:sld>
 </file>
 
-<file path=ppt/slides/slide8.xml><?xml version="1.0" encoding="utf-8"?>
+<file path=ppt/slides/slide7.xml><?xml version="1.0" encoding="utf-8"?>
 <p:sld xmlns:a="http://schemas.openxmlformats.org/drawingml/2006/main" xmlns:r="http://schemas.openxmlformats.org/officeDocument/2006/relationships" xmlns:p="http://schemas.openxmlformats.org/presentationml/2006/main" xmlns:m="http://schemas.openxmlformats.org/officeDocument/2006/math" xmlns:a14="http://schemas.microsoft.com/office/drawing/2010/main" showMasterSp="1" showMasterPhAnim="1">
   <p:cSld>
     <p:spTree>
@@ -15537,7 +14626,7 @@
       </p:grpSpPr>
       <p:sp>
         <p:nvSpPr>
-          <p:cNvPr id="108" name="Text 1"/>
+          <p:cNvPr id="101" name="Text 1"/>
           <p:cNvSpPr txBox="1"/>
           <p:nvPr/>
         </p:nvSpPr>
@@ -15581,7 +14670,7 @@
       </p:sp>
       <p:sp>
         <p:nvSpPr>
-          <p:cNvPr id="109" name="Slide Number Placeholder 0"/>
+          <p:cNvPr id="102" name="Slide Number Placeholder 0"/>
           <p:cNvSpPr txBox="1"/>
           <p:nvPr>
             <p:ph type="sldNum" sz="quarter" idx="4294967295"/>
@@ -15612,7 +14701,7 @@
       </p:sp>
       <p:sp>
         <p:nvSpPr>
-          <p:cNvPr id="110" name="Shape 1"/>
+          <p:cNvPr id="103" name="Shape 1"/>
           <p:cNvSpPr/>
           <p:nvPr/>
         </p:nvSpPr>
@@ -15654,7 +14743,7 @@
       </p:sp>
       <p:sp>
         <p:nvSpPr>
-          <p:cNvPr id="111" name="Text 2"/>
+          <p:cNvPr id="104" name="Text 2"/>
           <p:cNvSpPr txBox="1"/>
           <p:nvPr/>
         </p:nvSpPr>
@@ -15702,7 +14791,7 @@
       </p:sp>
       <p:sp>
         <p:nvSpPr>
-          <p:cNvPr id="112" name="Text 3"/>
+          <p:cNvPr id="105" name="Text 3"/>
           <p:cNvSpPr txBox="1"/>
           <p:nvPr/>
         </p:nvSpPr>
@@ -15750,7 +14839,7 @@
       </p:sp>
       <p:sp>
         <p:nvSpPr>
-          <p:cNvPr id="113" name="Text 4"/>
+          <p:cNvPr id="106" name="Text 4"/>
           <p:cNvSpPr txBox="1"/>
           <p:nvPr/>
         </p:nvSpPr>
@@ -15798,7 +14887,7 @@
       </p:sp>
       <p:sp>
         <p:nvSpPr>
-          <p:cNvPr id="114" name="Shape 5"/>
+          <p:cNvPr id="107" name="Shape 5"/>
           <p:cNvSpPr/>
           <p:nvPr/>
         </p:nvSpPr>
@@ -15840,7 +14929,7 @@
       </p:sp>
       <p:sp>
         <p:nvSpPr>
-          <p:cNvPr id="115" name="Text 6"/>
+          <p:cNvPr id="108" name="Text 6"/>
           <p:cNvSpPr txBox="1"/>
           <p:nvPr/>
         </p:nvSpPr>
@@ -15888,7 +14977,7 @@
       </p:sp>
       <p:sp>
         <p:nvSpPr>
-          <p:cNvPr id="116" name="Text 7"/>
+          <p:cNvPr id="109" name="Text 7"/>
           <p:cNvSpPr txBox="1"/>
           <p:nvPr/>
         </p:nvSpPr>
@@ -15936,7 +15025,7 @@
       </p:sp>
       <p:sp>
         <p:nvSpPr>
-          <p:cNvPr id="117" name="Text 8"/>
+          <p:cNvPr id="110" name="Text 8"/>
           <p:cNvSpPr txBox="1"/>
           <p:nvPr/>
         </p:nvSpPr>
@@ -15984,7 +15073,7 @@
       </p:sp>
       <p:sp>
         <p:nvSpPr>
-          <p:cNvPr id="118" name="Shape 9"/>
+          <p:cNvPr id="111" name="Shape 9"/>
           <p:cNvSpPr/>
           <p:nvPr/>
         </p:nvSpPr>
@@ -16026,7 +15115,7 @@
       </p:sp>
       <p:sp>
         <p:nvSpPr>
-          <p:cNvPr id="119" name="Text 10"/>
+          <p:cNvPr id="112" name="Text 10"/>
           <p:cNvSpPr txBox="1"/>
           <p:nvPr/>
         </p:nvSpPr>
@@ -16074,7 +15163,7 @@
       </p:sp>
       <p:sp>
         <p:nvSpPr>
-          <p:cNvPr id="120" name="Text 11"/>
+          <p:cNvPr id="113" name="Text 11"/>
           <p:cNvSpPr txBox="1"/>
           <p:nvPr/>
         </p:nvSpPr>
@@ -16122,7 +15211,7 @@
       </p:sp>
       <p:sp>
         <p:nvSpPr>
-          <p:cNvPr id="121" name="Text 12"/>
+          <p:cNvPr id="114" name="Text 12"/>
           <p:cNvSpPr txBox="1"/>
           <p:nvPr/>
         </p:nvSpPr>
@@ -16170,7 +15259,7 @@
       </p:sp>
       <p:sp>
         <p:nvSpPr>
-          <p:cNvPr id="122" name="Shape 13"/>
+          <p:cNvPr id="115" name="Shape 13"/>
           <p:cNvSpPr/>
           <p:nvPr/>
         </p:nvSpPr>
@@ -16212,7 +15301,7 @@
       </p:sp>
       <p:sp>
         <p:nvSpPr>
-          <p:cNvPr id="123" name="Text 14"/>
+          <p:cNvPr id="116" name="Text 14"/>
           <p:cNvSpPr txBox="1"/>
           <p:nvPr/>
         </p:nvSpPr>
@@ -16260,7 +15349,7 @@
       </p:sp>
       <p:sp>
         <p:nvSpPr>
-          <p:cNvPr id="124" name="Text 15"/>
+          <p:cNvPr id="117" name="Text 15"/>
           <p:cNvSpPr txBox="1"/>
           <p:nvPr/>
         </p:nvSpPr>
@@ -16308,7 +15397,7 @@
       </p:sp>
       <p:sp>
         <p:nvSpPr>
-          <p:cNvPr id="125" name="Text 16"/>
+          <p:cNvPr id="118" name="Text 16"/>
           <p:cNvSpPr txBox="1"/>
           <p:nvPr/>
         </p:nvSpPr>
@@ -16356,7 +15445,7 @@
       </p:sp>
       <p:sp>
         <p:nvSpPr>
-          <p:cNvPr id="126" name="Shape 17"/>
+          <p:cNvPr id="119" name="Shape 17"/>
           <p:cNvSpPr/>
           <p:nvPr/>
         </p:nvSpPr>
@@ -16398,7 +15487,7 @@
       </p:sp>
       <p:sp>
         <p:nvSpPr>
-          <p:cNvPr id="127" name="Text 18"/>
+          <p:cNvPr id="120" name="Text 18"/>
           <p:cNvSpPr txBox="1"/>
           <p:nvPr/>
         </p:nvSpPr>
@@ -16446,7 +15535,7 @@
       </p:sp>
       <p:sp>
         <p:nvSpPr>
-          <p:cNvPr id="128" name="Text 19"/>
+          <p:cNvPr id="121" name="Text 19"/>
           <p:cNvSpPr txBox="1"/>
           <p:nvPr/>
         </p:nvSpPr>
@@ -16494,7 +15583,7 @@
       </p:sp>
       <p:sp>
         <p:nvSpPr>
-          <p:cNvPr id="129" name="Text 20"/>
+          <p:cNvPr id="122" name="Text 20"/>
           <p:cNvSpPr txBox="1"/>
           <p:nvPr/>
         </p:nvSpPr>
@@ -16542,7 +15631,7 @@
       </p:sp>
       <p:sp>
         <p:nvSpPr>
-          <p:cNvPr id="130" name="Shape 13"/>
+          <p:cNvPr id="123" name="Shape 13"/>
           <p:cNvSpPr/>
           <p:nvPr/>
         </p:nvSpPr>
@@ -16584,7 +15673,7 @@
       </p:sp>
       <p:sp>
         <p:nvSpPr>
-          <p:cNvPr id="131" name="Text 14"/>
+          <p:cNvPr id="124" name="Text 14"/>
           <p:cNvSpPr txBox="1"/>
           <p:nvPr/>
         </p:nvSpPr>
@@ -16632,7 +15721,7 @@
       </p:sp>
       <p:sp>
         <p:nvSpPr>
-          <p:cNvPr id="132" name="Text 15"/>
+          <p:cNvPr id="125" name="Text 15"/>
           <p:cNvSpPr txBox="1"/>
           <p:nvPr/>
         </p:nvSpPr>
@@ -16680,7 +15769,7 @@
       </p:sp>
       <p:sp>
         <p:nvSpPr>
-          <p:cNvPr id="133" name="Text 16"/>
+          <p:cNvPr id="126" name="Text 16"/>
           <p:cNvSpPr txBox="1"/>
           <p:nvPr/>
         </p:nvSpPr>
@@ -16735,7 +15824,7 @@
 </p:sld>
 </file>
 
-<file path=ppt/slides/slide9.xml><?xml version="1.0" encoding="utf-8"?>
+<file path=ppt/slides/slide8.xml><?xml version="1.0" encoding="utf-8"?>
 <p:sld xmlns:a="http://schemas.openxmlformats.org/drawingml/2006/main" xmlns:r="http://schemas.openxmlformats.org/officeDocument/2006/relationships" xmlns:p="http://schemas.openxmlformats.org/presentationml/2006/main" xmlns:m="http://schemas.openxmlformats.org/officeDocument/2006/math" xmlns:a14="http://schemas.microsoft.com/office/drawing/2010/main" showMasterSp="1" showMasterPhAnim="1">
   <p:cSld>
     <p:spTree>
@@ -16754,13 +15843,13 @@
       </p:grpSpPr>
       <p:sp>
         <p:nvSpPr>
-          <p:cNvPr id="137" name="Text 1"/>
+          <p:cNvPr id="130" name="Text 1"/>
           <p:cNvSpPr txBox="1"/>
           <p:nvPr/>
         </p:nvSpPr>
         <p:spPr>
           <a:xfrm>
-            <a:off x="658368" y="566927"/>
+            <a:off x="658368" y="575436"/>
             <a:ext cx="8138160" cy="530353"/>
           </a:xfrm>
           <a:prstGeom prst="rect">
@@ -16798,7 +15887,7 @@
       </p:sp>
       <p:sp>
         <p:nvSpPr>
-          <p:cNvPr id="138" name="Text 1"/>
+          <p:cNvPr id="131" name="Text 1"/>
           <p:cNvSpPr txBox="1"/>
           <p:nvPr/>
         </p:nvSpPr>
@@ -16844,7 +15933,7 @@
       </p:sp>
       <p:sp>
         <p:nvSpPr>
-          <p:cNvPr id="139" name="Text 2"/>
+          <p:cNvPr id="132" name="Text 2"/>
           <p:cNvSpPr txBox="1"/>
           <p:nvPr/>
         </p:nvSpPr>
@@ -16886,7 +15975,7 @@
       </p:sp>
       <p:sp>
         <p:nvSpPr>
-          <p:cNvPr id="140" name="Text 3"/>
+          <p:cNvPr id="133" name="Text 3"/>
           <p:cNvSpPr txBox="1"/>
           <p:nvPr/>
         </p:nvSpPr>
@@ -16928,7 +16017,7 @@
       </p:sp>
       <p:sp>
         <p:nvSpPr>
-          <p:cNvPr id="141" name="Text 4"/>
+          <p:cNvPr id="134" name="Text 4"/>
           <p:cNvSpPr txBox="1"/>
           <p:nvPr/>
         </p:nvSpPr>
@@ -16970,7 +16059,7 @@
       </p:sp>
       <p:graphicFrame>
         <p:nvGraphicFramePr>
-          <p:cNvPr id="142" name="Tabelle 1"/>
+          <p:cNvPr id="135" name="Tabelle 1"/>
           <p:cNvGraphicFramePr/>
           <p:nvPr/>
         </p:nvGraphicFramePr>
@@ -17223,7 +16312,7 @@
       </p:graphicFrame>
       <p:sp>
         <p:nvSpPr>
-          <p:cNvPr id="143" name="Text 7"/>
+          <p:cNvPr id="136" name="Text 7"/>
           <p:cNvSpPr txBox="1"/>
           <p:nvPr/>
         </p:nvSpPr>
@@ -17265,7 +16354,7 @@
       </p:sp>
       <p:sp>
         <p:nvSpPr>
-          <p:cNvPr id="144" name="Text 9"/>
+          <p:cNvPr id="137" name="Text 9"/>
           <p:cNvSpPr txBox="1"/>
           <p:nvPr/>
         </p:nvSpPr>
@@ -17309,7 +16398,7 @@
       </p:sp>
       <p:sp>
         <p:nvSpPr>
-          <p:cNvPr id="145" name="Text 10"/>
+          <p:cNvPr id="138" name="Text 10"/>
           <p:cNvSpPr txBox="1"/>
           <p:nvPr/>
         </p:nvSpPr>
@@ -17353,7 +16442,7 @@
       </p:sp>
       <p:sp>
         <p:nvSpPr>
-          <p:cNvPr id="146" name="Text 15"/>
+          <p:cNvPr id="139" name="Text 15"/>
           <p:cNvSpPr txBox="1"/>
           <p:nvPr/>
         </p:nvSpPr>
@@ -17397,7 +16486,7 @@
       </p:sp>
       <p:sp>
         <p:nvSpPr>
-          <p:cNvPr id="147" name="Text 16"/>
+          <p:cNvPr id="140" name="Text 16"/>
           <p:cNvSpPr txBox="1"/>
           <p:nvPr/>
         </p:nvSpPr>
@@ -17441,7 +16530,7 @@
       </p:sp>
       <p:sp>
         <p:nvSpPr>
-          <p:cNvPr id="148" name="Text 21"/>
+          <p:cNvPr id="141" name="Text 21"/>
           <p:cNvSpPr txBox="1"/>
           <p:nvPr/>
         </p:nvSpPr>
@@ -17485,7 +16574,7 @@
       </p:sp>
       <p:sp>
         <p:nvSpPr>
-          <p:cNvPr id="149" name="Text 22"/>
+          <p:cNvPr id="142" name="Text 22"/>
           <p:cNvSpPr txBox="1"/>
           <p:nvPr/>
         </p:nvSpPr>
@@ -17529,7 +16618,7 @@
       </p:sp>
       <p:sp>
         <p:nvSpPr>
-          <p:cNvPr id="150" name="Text 2"/>
+          <p:cNvPr id="143" name="Text 2"/>
           <p:cNvSpPr txBox="1"/>
           <p:nvPr/>
         </p:nvSpPr>
@@ -17571,7 +16660,7 @@
       </p:sp>
       <p:sp>
         <p:nvSpPr>
-          <p:cNvPr id="151" name="Text 7"/>
+          <p:cNvPr id="144" name="Text 7"/>
           <p:cNvSpPr txBox="1"/>
           <p:nvPr/>
         </p:nvSpPr>
@@ -17613,7 +16702,7 @@
       </p:sp>
       <p:sp>
         <p:nvSpPr>
-          <p:cNvPr id="152" name="Text 7"/>
+          <p:cNvPr id="145" name="Text 7"/>
           <p:cNvSpPr txBox="1"/>
           <p:nvPr/>
         </p:nvSpPr>
@@ -17655,7 +16744,7 @@
       </p:sp>
       <p:sp>
         <p:nvSpPr>
-          <p:cNvPr id="153" name="Text 10"/>
+          <p:cNvPr id="146" name="Text 10"/>
           <p:cNvSpPr txBox="1"/>
           <p:nvPr/>
         </p:nvSpPr>
@@ -17699,7 +16788,7 @@
       </p:sp>
       <p:sp>
         <p:nvSpPr>
-          <p:cNvPr id="154" name="Text 10"/>
+          <p:cNvPr id="147" name="Text 10"/>
           <p:cNvSpPr txBox="1"/>
           <p:nvPr/>
         </p:nvSpPr>
@@ -17743,7 +16832,7 @@
       </p:sp>
       <p:sp>
         <p:nvSpPr>
-          <p:cNvPr id="155" name="Text 10"/>
+          <p:cNvPr id="148" name="Text 10"/>
           <p:cNvSpPr txBox="1"/>
           <p:nvPr/>
         </p:nvSpPr>
@@ -17787,7 +16876,7 @@
       </p:sp>
       <p:sp>
         <p:nvSpPr>
-          <p:cNvPr id="156" name="Slide Number Placeholder 0"/>
+          <p:cNvPr id="149" name="Slide Number Placeholder 0"/>
           <p:cNvSpPr txBox="1"/>
           <p:nvPr>
             <p:ph type="sldNum" sz="quarter" idx="4294967295"/>
@@ -17797,6 +16886,180 @@
           <a:xfrm>
             <a:off x="11567159" y="6479260"/>
             <a:ext cx="153570" cy="190552"/>
+          </a:xfrm>
+          <a:prstGeom prst="rect">
+            <a:avLst/>
+          </a:prstGeom>
+          <a:extLst>
+            <a:ext uri="{C572A759-6A51-4108-AA02-DFA0A04FC94B}">
+              <ma14:wrappingTextBoxFlag xmlns:ma14="http://schemas.microsoft.com/office/mac/drawingml/2011/main" val="1"/>
+            </a:ext>
+          </a:extLst>
+        </p:spPr>
+        <p:txBody>
+          <a:bodyPr/>
+          <a:lstStyle/>
+          <a:p>
+            <a:pPr/>
+            <a:fld id="{86CB4B4D-7CA3-9044-876B-883B54F8677D}" type="slidenum"/>
+          </a:p>
+        </p:txBody>
+      </p:sp>
+    </p:spTree>
+  </p:cSld>
+  <p:clrMapOvr>
+    <a:masterClrMapping/>
+  </p:clrMapOvr>
+  <p:transition xmlns:p14="http://schemas.microsoft.com/office/powerpoint/2010/main" spd="med" advClick="1"/>
+</p:sld>
+</file>
+
+<file path=ppt/slides/slide9.xml><?xml version="1.0" encoding="utf-8"?>
+<p:sld xmlns:a="http://schemas.openxmlformats.org/drawingml/2006/main" xmlns:r="http://schemas.openxmlformats.org/officeDocument/2006/relationships" xmlns:p="http://schemas.openxmlformats.org/presentationml/2006/main" xmlns:m="http://schemas.openxmlformats.org/officeDocument/2006/math" xmlns:a14="http://schemas.microsoft.com/office/drawing/2010/main" showMasterSp="1" showMasterPhAnim="1">
+  <p:cSld>
+    <p:spTree>
+      <p:nvGrpSpPr>
+        <p:cNvPr id="1" name=""/>
+        <p:cNvGrpSpPr/>
+        <p:nvPr/>
+      </p:nvGrpSpPr>
+      <p:grpSpPr>
+        <a:xfrm>
+          <a:off x="0" y="0"/>
+          <a:ext cx="0" cy="0"/>
+          <a:chOff x="0" y="0"/>
+          <a:chExt cx="0" cy="0"/>
+        </a:xfrm>
+      </p:grpSpPr>
+      <p:sp>
+        <p:nvSpPr>
+          <p:cNvPr id="153" name="Text 1"/>
+          <p:cNvSpPr txBox="1"/>
+          <p:nvPr/>
+        </p:nvSpPr>
+        <p:spPr>
+          <a:xfrm>
+            <a:off x="658368" y="566927"/>
+            <a:ext cx="8138160" cy="530353"/>
+          </a:xfrm>
+          <a:prstGeom prst="rect">
+            <a:avLst/>
+          </a:prstGeom>
+          <a:ln w="12700">
+            <a:miter lim="400000"/>
+          </a:ln>
+          <a:extLst>
+            <a:ext uri="{C572A759-6A51-4108-AA02-DFA0A04FC94B}">
+              <ma14:wrappingTextBoxFlag xmlns:ma14="http://schemas.microsoft.com/office/mac/drawingml/2011/main" val="1"/>
+            </a:ext>
+          </a:extLst>
+        </p:spPr>
+        <p:txBody>
+          <a:bodyPr lIns="253" tIns="253" rIns="253" bIns="253" anchor="ctr">
+            <a:normAutofit fontScale="100000" lnSpcReduction="0"/>
+          </a:bodyPr>
+          <a:lstStyle>
+            <a:lvl1pPr defTabSz="859536">
+              <a:defRPr b="1" sz="2538">
+                <a:solidFill>
+                  <a:srgbClr val="212B48"/>
+                </a:solidFill>
+              </a:defRPr>
+            </a:lvl1pPr>
+          </a:lstStyle>
+          <a:p>
+            <a:pPr/>
+            <a:r>
+              <a:t>WHO-Analyse: Hypertonie-Kennzahlen im Zeitverlauf</a:t>
+            </a:r>
+          </a:p>
+        </p:txBody>
+      </p:sp>
+      <p:pic>
+        <p:nvPicPr>
+          <p:cNvPr id="154" name="who-tableau-dashboard.png" descr="who-tableau-dashboard.png"/>
+          <p:cNvPicPr>
+            <a:picLocks noChangeAspect="1"/>
+          </p:cNvPicPr>
+          <p:nvPr/>
+        </p:nvPicPr>
+        <p:blipFill>
+          <a:blip r:embed="rId2">
+            <a:extLst/>
+          </a:blip>
+          <a:srcRect l="0" t="16198" r="0" b="8969"/>
+          <a:stretch>
+            <a:fillRect/>
+          </a:stretch>
+        </p:blipFill>
+        <p:spPr>
+          <a:xfrm>
+            <a:off x="2023095" y="1684857"/>
+            <a:ext cx="8145844" cy="4546043"/>
+          </a:xfrm>
+          <a:prstGeom prst="rect">
+            <a:avLst/>
+          </a:prstGeom>
+          <a:ln w="12700">
+            <a:miter lim="400000"/>
+          </a:ln>
+        </p:spPr>
+      </p:pic>
+      <p:sp>
+        <p:nvSpPr>
+          <p:cNvPr id="155" name="Deutschland, 2000–2019 | Prävalenz, Mortalität und Geschlechterunterschiede"/>
+          <p:cNvSpPr txBox="1"/>
+          <p:nvPr/>
+        </p:nvSpPr>
+        <p:spPr>
+          <a:xfrm>
+            <a:off x="2614770" y="1335548"/>
+            <a:ext cx="9059825" cy="483555"/>
+          </a:xfrm>
+          <a:prstGeom prst="rect">
+            <a:avLst/>
+          </a:prstGeom>
+          <a:ln w="12700">
+            <a:miter lim="400000"/>
+          </a:ln>
+          <a:extLst>
+            <a:ext uri="{C572A759-6A51-4108-AA02-DFA0A04FC94B}">
+              <ma14:wrappingTextBoxFlag xmlns:ma14="http://schemas.microsoft.com/office/mac/drawingml/2011/main" val="1"/>
+            </a:ext>
+          </a:extLst>
+        </p:spPr>
+        <p:txBody>
+          <a:bodyPr lIns="45719" rIns="45719"/>
+          <a:lstStyle>
+            <a:lvl1pPr defTabSz="457200">
+              <a:defRPr b="1" sz="1400">
+                <a:solidFill>
+                  <a:srgbClr val="212B48"/>
+                </a:solidFill>
+              </a:defRPr>
+            </a:lvl1pPr>
+          </a:lstStyle>
+          <a:p>
+            <a:pPr/>
+            <a:r>
+              <a:t>Deutschland, 2000–2019 | Prävalenz, Mortalität und Geschlechterunterschiede</a:t>
+            </a:r>
+            <a:endParaRPr b="0"/>
+          </a:p>
+        </p:txBody>
+      </p:sp>
+      <p:sp>
+        <p:nvSpPr>
+          <p:cNvPr id="156" name="Foliennummer"/>
+          <p:cNvSpPr txBox="1"/>
+          <p:nvPr>
+            <p:ph type="sldNum" sz="quarter" idx="4294967295"/>
+          </p:nvPr>
+        </p:nvSpPr>
+        <p:spPr>
+          <a:xfrm>
+            <a:off x="11567159" y="6473952"/>
+            <a:ext cx="153570" cy="190551"/>
           </a:xfrm>
           <a:prstGeom prst="rect">
             <a:avLst/>
